--- a/presentation/algorithm-visualizer-video.pptx
+++ b/presentation/algorithm-visualizer-video.pptx
@@ -628,7 +628,7 @@
             <a:r>
               <a:rPr lang="en-US" dirty="0"/>
               <a:t>Thời lượng: ~22s.
-Lời đọc: "Greedy tô mỗi đỉnh bằng màu nhỏ nhất chưa dùng ở đỉnh kề — không bảo đảm tìm được cách tô dù nó tồn tại. Welsh–Powell chỉ khác ở một điểm: sắp đỉnh theo bậc giảm dần trước. Nhưng trên vương miện mọi đỉnh cùng bậc hai, nên thứ tự không đổi — Welsh–Powell gặp đúng khó khăn của greedy."</a:t>
+Lời đọc: "Greedy tô mỗi vertex bằng màu nhỏ nhất chưa dùng ở vertex kề — không bảo đảm tìm được cách tô dù nó tồn tại. Welsh–Powell chỉ khác ở một điểm: sắp vertex theo degree giảm dần trước. Nhưng trên vương miện mọi vertex cùng degree hai, nên thứ tự không đổi — Welsh–Powell gặp đúng khó khăn của greedy."</a:t>
             </a:r>
             <a:endParaRPr lang="en-US" dirty="0"/>
           </a:p>
@@ -717,7 +717,7 @@
             <a:r>
               <a:rPr lang="en-US" dirty="0"/>
               <a:t>Thời lượng: ~22s.
-Lời đọc: "DSATUR, do Brélaz công bố năm 1979, mỗi vòng chọn đỉnh chưa tô có độ bão hòa lớn nhất — hòa thì chọn bậc lớn hơn. Nó luôn tô đúng hai màu trên đồ thị hai phía, nên trên ví dụ chung nó thành công trong khi greedy thất bại. Trong app, vì mỗi vòng quét lại mọi cặp đỉnh, chi phí là O(n lập phương cộng n·k)."</a:t>
+Lời đọc: "DSATUR, do Brélaz công bố năm 1979, mỗi vòng chọn vertex chưa tô có độ bão hòa lớn nhất — hòa thì chọn degree lớn hơn. Nó luôn tô đúng hai màu trên đồ thị hai phía, nên trên ví dụ chung nó thành công trong khi greedy thất bại. Trong app, vì mỗi vòng quét lại mọi cặp vertex, chi phí là O(n lập phương cộng n·k)."</a:t>
             </a:r>
             <a:endParaRPr lang="en-US" dirty="0"/>
           </a:p>
@@ -806,7 +806,7 @@
             <a:r>
               <a:rPr lang="en-US" dirty="0"/>
               <a:t>Thời lượng: ~24s.
-Lời đọc: "Quay lui thử từng màu cho mỗi đỉnh; trùng màu đỉnh kề thì loại, hết màu thì quay lui lên đỉnh trước. Vì mọi nhánh bị cắt đã vi phạm ràng buộc, trả về false sau khi duyệt hết nghĩa là chắc chắn không có cách tô — khác biệt quan trọng so với heuristic. Việc cắt nhánh giảm số nút phải thăm rất nhiều. Ở chế độ sắc số, nó còn tính chặn dưới bằng clique và chặn trên bằng DSATUR."</a:t>
+Lời đọc: "Backtracking thử từng màu cho mỗi vertex; trùng màu vertex kề thì loại, hết màu thì backtrack lên vertex trước. Vì mọi nhánh bị cắt đã vi phạm ràng buộc, trả về false sau khi duyệt hết nghĩa là chắc chắn không có cách tô — khác biệt quan trọng so với heuristic. Việc pruning giảm số nút phải thăm rất nhiều. Ở chromatic mode, nó còn tính lower bound bằng clique và upper bound bằng DSATUR."</a:t>
             </a:r>
             <a:endParaRPr lang="en-US" dirty="0"/>
           </a:p>
@@ -895,7 +895,7 @@
             <a:r>
               <a:rPr lang="en-US" dirty="0"/>
               <a:t>Thời lượng: ~16s.
-Lời đọc: "Vét cạn sinh tất cả kⁿ cách gán màu, trả về nghiệm đầu tiên hợp lệ — mốc để so sánh hiệu quả cắt nhánh của quay lui. App chỉ cho chạy an toàn khi kⁿ không vượt hai trăm nghìn."</a:t>
+Lời đọc: "Exhaustive search sinh tất cả kⁿ cách gán màu, trả về nghiệm đầu tiên hợp lệ — mốc để so sánh hiệu quả pruning của backtracking. App chỉ cho chạy an toàn khi kⁿ không vượt hai trăm nghìn."</a:t>
             </a:r>
             <a:endParaRPr lang="en-US" dirty="0"/>
           </a:p>
@@ -984,7 +984,7 @@
             <a:r>
               <a:rPr lang="en-US" dirty="0"/>
               <a:t>Thời lượng: ~16s.
-Lời đọc: "Ba heuristic chạy nhanh nhưng không kết luận chắc chắn. Quay lui và vét cạn chắc chắn, nhưng chỉ an toàn với đồ thị rất nhỏ — đánh đổi giữa nhanh mà không chắc chắn, và chắc chắn mà tốn chi phí."</a:t>
+Lời đọc: "Ba heuristic chạy nhanh nhưng không kết luận chắc chắn. Backtracking và exhaustive search chắc chắn, nhưng chỉ an toàn với đồ thị rất nhỏ — đánh đổi giữa nhanh mà không chắc chắn, và chắc chắn mà tốn chi phí."</a:t>
             </a:r>
             <a:endParaRPr lang="en-US" dirty="0"/>
           </a:p>
@@ -1073,7 +1073,7 @@
             <a:r>
               <a:rPr lang="en-US" dirty="0"/>
               <a:t>Thời lượng: ~18s.
-Lời đọc: "Ví dụ chung là đồ thị vương miện sáu đỉnh: nhóm A và nhóm B, loài Ai kỵ mọi loài Bj trừ Bi. Đây là đồ thị hai phía nên χ bằng 2, nhưng em cố ý nhập thứ tự xen kẽ A, B, A, B để thử thách các thuật toán. DSATUR tránh được bẫy này vì luôn ưu tiên đỉnh bị ràng buộc nhiều nhất."</a:t>
+Lời đọc: "Ví dụ chung là đồ thị vương miện sáu vertex: nhóm A và nhóm B, loài Ai kỵ mọi loài Bj trừ Bi. Đây là đồ thị hai phía nên χ bằng 2, nhưng em cố ý nhập thứ tự xen kẽ A, B, A, B để thử thách các thuật toán. DSATUR tránh được bẫy này vì luôn ưu tiên vertex bị ràng buộc nhiều nhất."</a:t>
             </a:r>
             <a:endParaRPr lang="en-US" dirty="0"/>
           </a:p>
@@ -1252,7 +1252,7 @@
             <a:r>
               <a:rPr lang="en-US" dirty="0"/>
               <a:t>Thời lượng slide: ~16s + demo ~20s (tổng ~36s).
-Lời đọc: "Em bấm Tiến bước từng bước. Bước 2–3: A1 và B1 nhận màu 0. Bước 4–7: màu trùng đỉnh kề bị loại, A2 và B2 nhận màu 1. Bước 8–9: A3 kề cả B1 (0) lẫn B2 (1), cả hai màu bị loại — bế tắc. Em chuyển sang view cây trạng thái để xem hai nhánh này bị cắt."
+Lời đọc: "Em bấm Tiến bước từng bước. Bước 2–3: A1 và B1 nhận màu 0. Bước 4–7: màu trùng vertex kề bị loại, A2 và B2 nhận màu 1. Bước 8–9: A3 kề cả B1 (0) lẫn B2 (1), cả hai màu bị loại — bế tắc. Em chuyển sang state-space tree view để xem hai nhánh này bị cắt."
 [CHUYỂN SANG DEMO: Player quay lui, bấm "Chạy" rồi bấm "Tiến bước" 9 lần tới bước 9; dừng ~5 giây ở bước 9; bấm nút chuyển view sang "Cây trạng thái" và zoom vào hai nhánh bị loại dưới A3; chuyển lại view "Đồ thị"]</a:t>
             </a:r>
             <a:endParaRPr lang="en-US" dirty="0"/>
@@ -1342,7 +1342,7 @@
             <a:r>
               <a:rPr lang="en-US" dirty="0"/>
               <a:t>Thời lượng slide: ~20s + demo ~20s (tổng ~40s).
-Lời đọc: "Bước 10–12: quay lui qua B2, qua A2, dừng ở B1 — gốc của bế tắc là B1 cùng màu với A1. Bước 13: B1 đổi sang màu 1, và đến bước 20 thì tô xong — hai mươi bước, sáu lần cắt nhánh. Em có thể lùi về bất kỳ bước nào. Checker xác nhận đây là cách tô hợp lệ."
+Lời đọc: "Bước 10–12: backtrack qua B2, qua A2, dừng ở B1 — gốc của bế tắc là B1 cùng màu với A1. Bước 13: B1 đổi sang màu 1, và đến bước 20 thì tô xong — hai mươi bước, sáu lần pruning. Em có thể lùi về bất kỳ bước nào. Checker xác nhận đây là cách tô hợp lệ."
 [CHUYỂN SANG DEMO: tiếp tục bấm "Tiến bước" tới bước 20; bấm "Lùi bước" về bước 12 để minh họa có thể xem lại; chỉ vào vùng kết quả/checker ở dưới Player]</a:t>
             </a:r>
             <a:endParaRPr lang="en-US" dirty="0"/>
@@ -1431,9 +1431,9 @@
           <a:p>
             <a:r>
               <a:rPr lang="en-US" dirty="0"/>
-              <a:t>Thời lượng slide: ~16s + demo ~18s (tổng ~34s).
-Lời đọc: "Trên trang So sánh, cả năm thuật toán chạy cùng lúc trên cùng đồ thị. Greedy và Welsh– Powell đều báo chưa tìm được. DSATUR thành công trong mười bốn bước. Quay lui chỉ cần hai mươi bước so với sáu mươi chín của vét cạn — hiệu quả của cắt nhánh sớm."
-[CHUYỂN SANG DEMO: https://algorithm-visualizer.hieutk.dev/compare/graph-coloring → dán lại JSON ví dụ chung vào trình nhập → bấm "Chạy tất cả" → zoom vào cột số bước/phép toán]</a:t>
+              <a:t>Thời lượng slide: ~20s + demo ~18s (tổng ~38s).
+Lời đọc: "Trên trang So sánh, năm thuật toán chạy cùng lúc — mỗi thuật toán có checkbox riêng, và dropdown Đồng bộ đồng bộ các lane theo phần trăm tiến độ, giai đoạn hoặc số bước. Greedy và Welsh–Powell báo chưa tìm được. DSATUR thành công trong mười bốn bước. Backtracking chỉ cần hai mươi bước so với sáu mươi chín của exhaustive search."
+[CHUYỂN SANG DEMO: https://algorithm-visualizer.hieutk.dev/compare/graph-coloring → dán lại JSON ví dụ chung vào trình nhập → bấm "Chạy tất cả" → tắt/bật thử 1 checkbox thuật toán → mở dropdown "Đồng bộ" và chọn "% tiến độ" → kéo thử thanh trượt "Bước" của một lane → zoom vào cột số bước/phép toán và cột "Trung vị ms"]</a:t>
             </a:r>
             <a:endParaRPr lang="en-US" dirty="0"/>
           </a:p>
@@ -1521,8 +1521,8 @@
           <a:p>
             <a:r>
               <a:rPr lang="en-US" dirty="0"/>
-              <a:t>Thời lượng: ~42s.
-Lời đọc: "Lý do đầu tiên: cô nhận xét phần thiết kế thuật toán của nhiều bạn còn yếu, và nêu đúng ví dụ bài Sở thú là bài toán tô màu đồ thị. Lý do thứ hai: em cho ba mô hình AI tranh luận chiến lược làm bài, và cả ba cùng đề xuất tô màu đồ thị, vì có nhiều cách giải để so sánh và trạng thái từng bước dễ minh họa. Bài toán bắt nguồn từ bài toán bốn màu của Guthrie, được trình bày trong sách Levitin, với hai heuristic nổi tiếng là Welsh–Powell và DSATUR."
+              <a:t>Thời lượng: ~35s.
+Lời đọc: "Lý do đầu tiên: cô nhận xét thiết kế thuật toán của nhiều bạn còn yếu, và nêu đúng ví dụ Sở thú là bài tô màu đồ thị. Lý do thứ hai: ba mô hình AI em cho tranh luận đều đề xuất tô màu đồ thị, vì có nhiều cách giải để so sánh và trạng thái từng bước dễ minh họa. Bài toán bắt nguồn từ bài toán bốn màu của Guthrie, trình bày trong sách Levitin, với hai heuristic nổi tiếng Welsh–Powell và DSATUR."
 [SV XÁC NHẬN: viết lại lý do bằng lời của chính mình trước khi quay]</a:t>
             </a:r>
             <a:endParaRPr lang="en-US" dirty="0"/>
@@ -1612,7 +1612,7 @@
             <a:r>
               <a:rPr lang="en-US" dirty="0"/>
               <a:t>Thời lượng slide: ~14s + demo ~14s (tổng ~28s).
-Lời đọc: "Ở chế độ tìm sắc số, greedy tô được nhưng dùng ba màu, trong khi χ thật chỉ bằng hai. DSATUR, quay lui và vét cạn đều dùng đúng hai màu — một góc nhìn khác của cùng phản ví dụ."
+Lời đọc: "Ở chromatic mode, greedy tô được nhưng dùng ba màu, trong khi χ thật chỉ bằng hai. DSATUR, backtracking và exhaustive search đều dùng đúng hai màu — một góc nhìn khác của cùng phản ví dụ."
 [CHUYỂN SANG DEMO: vẫn ở trang So sánh, trong trình nhập đổi chế độ sang "Tìm sắc số χ(G)" → bấm "Chạy tất cả" lại → chỉ vào cột "Giá trị" (số màu)]</a:t>
             </a:r>
             <a:endParaRPr lang="en-US" dirty="0"/>
@@ -1702,7 +1702,7 @@
             <a:r>
               <a:rPr lang="en-US" dirty="0"/>
               <a:t>Thời lượng slide: ~14s + demo ~16s (tổng ~30s).
-Lời đọc: "Đây là trang Player. Bên trái là thanh điều hướng theo chương, kỹ thuật hoặc tên bài. Phía trên là nút chuyển nhanh giữa năm cách giải. Giữa là khung đồ thị, cho thấy màu từng đỉnh và đỉnh đang xét."
+Lời đọc: "Đây là trang Player. Bên trái là thanh điều hướng theo chương, kỹ thuật hoặc tên bài. Phía trên là nút chuyển nhanh giữa năm cách giải. Giữa là khung đồ thị, cho thấy màu từng vertex và vertex đang xét."
 [CHUYỂN SANG DEMO: /play/graph-coloring/backtracking → lướt qua thanh bên, nút chuyển 5 thuật toán, trình nhập liệu (JSON / sinh ngẫu nhiên / mẫu), rồi khung đồ thị — không bấm chạy]</a:t>
             </a:r>
             <a:endParaRPr lang="en-US" dirty="0"/>
@@ -1791,9 +1791,9 @@
           <a:p>
             <a:r>
               <a:rPr lang="en-US" dirty="0"/>
-              <a:t>Thời lượng slide: ~16s + demo ~16s (tổng ~32s).
-Lời đọc: "Bên cạnh là mã giả với dòng đang chạy tô đậm, và lời giải thích tiếng Việt cho từng bước. Thanh điều khiển cho tiến, lùi, tua, tốc độ, có phím tắt. Giao diện chỉ dùng trắng đen — trạng thái phân biệt bằng độ đậm và viền, không dựa vào màu sắc."
-[CHUYỂN SANG DEMO: tiếp tục ở Player — khoanh khung mã giả, lời giải thích, thanh điều khiển, rồi bấm nút chuyển view sang "Cây trạng thái" rồi chuyển lại]</a:t>
+              <a:t>Thời lượng slide: ~19s + demo ~16s (tổng ~35s).
+Lời đọc: "Bên cạnh là mã giả với dòng đang chạy tô đậm, thẻ Giải thích bước bằng tiếng Việt, và thẻ Trạng thái hiển thị giai đoạn hiện tại — place, reject, backtrack hoặc done. Thanh điều khiển cho tiến, lùi, tua, tốc độ, có phím tắt. Giao diện chỉ dùng trắng đen — trạng thái phân biệt bằng độ đậm và viền, không dựa vào màu sắc."
+[CHUYỂN SANG DEMO: tiếp tục ở Player — khoanh khung mã giả, thẻ "Giải thích bước", thẻ "Trạng thái" (chỉ vào dòng "Giai đoạn: …"), thanh điều khiển, rồi bấm nút chuyển view sang "Cây trạng thái" rồi chuyển lại]</a:t>
             </a:r>
             <a:endParaRPr lang="en-US" dirty="0"/>
           </a:p>
@@ -1971,8 +1971,8 @@
           <a:p>
             <a:r>
               <a:rPr lang="en-US" dirty="0"/>
-              <a:t>Thời lượng slide: ~13s + demo ~16s (tổng ~29s).
-Lời đọc: "Trang Testcase chạy toàn bộ dữ liệu, chia sáu nhóm, đạt hai mươi hai trên hai mươi hai ca. Kết quả xuất được ra CSV hoặc JSON để đưa vào report."
+              <a:t>Thời lượng slide: ~17s + demo ~16s (tổng ~33s).
+Lời đọc: "Trang Testcase chạy toàn bộ dữ liệu, chia sáu nhóm, đạt 22 trên 22 ca. Phần lớn nhánh thuật toán được phủ ngay trong 22 file này; riêng heuristic bế tắc dù đồ thị có nghiệm thì được phủ bằng một unit test của greedy, chưa có file riêng. Kết quả xuất CSV hoặc JSON để đưa vào report."
 [CHUYỂN SANG DEMO: /testcases/graph-coloring → bấm chạy toàn bộ → dừng ở dòng "Đạt 22/22" → cuộn qua các nhóm → bấm xuất CSV/JSON]</a:t>
             </a:r>
             <a:endParaRPr lang="en-US" dirty="0"/>
@@ -2061,8 +2061,8 @@
           <a:p>
             <a:r>
               <a:rPr lang="en-US" dirty="0"/>
-              <a:t>Thời lượng slide: ~13s + demo ~16s (tổng ~29s).
-Lời đọc: "Với đồ thị ba trăm đỉnh, các heuristic vẫn chạy được, DSATUR dùng ít màu nhất. Thuật toán chính xác báo rõ "không áp dụng" thay vì treo trình duyệt."
+              <a:t>Thời lượng slide: ~15s + demo ~16s (tổng ~31s).
+Lời đọc: "Với đồ thị ba trăm vertex, các heuristic vẫn chạy được, DSATUR dùng ít màu nhất. Thuật toán chính xác báo rõ "không áp dụng" thay vì treo trình duyệt."
 [CHUYỂN SANG DEMO: /compare/graph-coloring → trình nhập chọn "Tìm sắc số χ(G)", bộ sinh ngẫu nhiên n=300, p=0,1, seed=1 → "Chạy tất cả" (xem 3 heuristic ra kết quả); sau đó mở /play/graph-coloring/backtracking, sinh lại cùng đồ thị, bấm "Chạy" → chỉ vào thông báo "Không áp dụng: …"]</a:t>
             </a:r>
             <a:endParaRPr lang="en-US" dirty="0"/>
@@ -2419,7 +2419,7 @@
             <a:r>
               <a:rPr lang="en-US" dirty="0"/>
               <a:t>Thời lượng: ~24s.
-Lời đọc: "Bốn sự cố. Checker bài tô màu từng tự tham chiếu chính thuật toán đang kiểm — sửa bằng oracle độc lập. Ở bài cái túi, nút tìm được nghiệm tốt nhất bị đánh dấu sai là bị cắt — tám test hồi quy fail trên code cũ xác nhận. Nhiều lời giải tham chiếu khác cũng tự tham chiếu. Và 136 file bị viết dồn một dòng. Cả bốn đều do reviewer hãng khác phát hiện."</a:t>
+Lời đọc: "Bốn sự cố. Checker bài tô màu từng tự tham chiếu chính thuật toán đang kiểm — sửa bằng oracle độc lập. Ở bài cái túi, nút nghiệm tốt nhất bị đánh dấu sai là bị cắt — tám test hồi quy fail trên code cũ xác nhận. Nhiều lời giải tham chiếu khác cũng tự tham chiếu, và 136 file bị viết dồn một dòng. Cả bốn đều do reviewer hãng khác phát hiện."</a:t>
             </a:r>
             <a:endParaRPr lang="en-US" dirty="0"/>
           </a:p>
@@ -2508,7 +2508,7 @@
             <a:r>
               <a:rPr lang="en-US" dirty="0"/>
               <a:t>Thời lượng: ~16s.
-Lời đọc: "Tô màu đồ thị có nhiều ứng dụng: xếp lịch thi, phân chuồng sở thú hay phân phòng khách, cấp phát thanh ghi trong trình biên dịch, phân tần số trạm phát sóng — và ngay cả Sudoku cũng là một bài toán tô chín màu trên đồ thị tám mươi mốt đỉnh."</a:t>
+Lời đọc: "Tô màu đồ thị có nhiều ứng dụng: xếp lịch thi, phân chuồng sở thú hay phân phòng khách, cấp phát thanh ghi trong trình biên dịch, phân tần số trạm phát sóng — và ngay cả Sudoku cũng là một bài toán tô chín màu trên đồ thị tám mươi mốt vertex."</a:t>
             </a:r>
             <a:endParaRPr lang="en-US" dirty="0"/>
           </a:p>
@@ -2863,8 +2863,8 @@
           <a:p>
             <a:r>
               <a:rPr lang="en-US" dirty="0"/>
-              <a:t>Thời lượng: ~22s.
-Lời đọc: "Tính đúng: đạt 22/22 testcase, 314/314 e2e pass trên domain thật. Trực quan: mỗi bước có mã giả, giải thích, trạng thái đồ thị, lùi được bất kỳ bước. Hạn chế: thuật toán chính xác chỉ chạy đồ thị nhỏ, trên 12 đỉnh không biết χ thật, và toàn bộ code do AI sinh có thể còn lỗi chưa phát hiện."</a:t>
+              <a:t>Thời lượng: ~34s.
+Lời đọc: "Tính đúng: đạt 22/22 testcase, 314/314 e2e pass trên domain thật. Backtracking kiểm bằng oracle existsColoring; exhaustive search so với backtracking trên nhiều input, cộng oracle χ(G) trên vài đồ thị nhỏ như vương miện, chu trình. Trực quan: mỗi bước có mã giả, giải thích, trạng thái đồ thị, lùi được bất kỳ bước. Hạn chế: thuật toán chính xác chỉ chạy đồ thị nhỏ, trên 12 vertex không biết χ thật, code do AI sinh có thể còn lỗi."</a:t>
             </a:r>
             <a:endParaRPr lang="en-US" dirty="0"/>
           </a:p>
@@ -2952,8 +2952,8 @@
           <a:p>
             <a:r>
               <a:rPr lang="en-US" dirty="0"/>
-              <a:t>Thời lượng slide: ~16s + demo ~10s (tổng ~26s).
-Lời đọc: "Hướng tới: thêm nhánh cận để tìm χ(G) trên đồ thị lớn hơn, thêm biến thể như tô màu cạnh. Ngoài bài trọng tâm, nền tảng này còn dùng được cho 47 bài toán, 126 cách giải trong sách Levitin — nhưng phần nộp chấm chính vẫn là bài tô màu đồ thị."
+              <a:t>Thời lượng slide: ~18s + demo ~10s (tổng ~28s).
+Lời đọc: "Hướng tới: thêm nhánh cận để tìm χ(G) trên đồ thị lớn hơn, thêm biến thể như tô màu edge. Nền tảng này còn dùng cho 47 bài toán, 126 cách giải — phần lớn theo Levitin, trừ vài ngoại lệ app ghi rõ như DSATUR, Hungarian. Phần nộp chấm chính vẫn là bài tô màu đồ thị."
 [CHUYỂN SANG DEMO: /algorithms → Ctrl+K gõ "Dijkstra" → mở Player Dijkstra (hoặc LCS) → cho chạy 3–4 bước]</a:t>
             </a:r>
             <a:endParaRPr lang="en-US" dirty="0"/>
@@ -3133,7 +3133,7 @@
             <a:r>
               <a:rPr lang="en-US" dirty="0"/>
               <a:t>Thời lượng: ~16s.
-Lời đọc: "Bài toán bắt đầu từ một sở thú: có những loài không thể nhốt chung chuồng. Với k chuồng, có xếp được tất cả các loài sao cho không chuồng nào có hai loài kỵ nhau hay không. App còn có chế độ mở rộng: tìm sắc số, tức số chuồng ít nhất cần dùng."</a:t>
+Lời đọc: "Bài toán bắt đầu từ một sở thú: có những loài không thể nhốt chung chuồng. Với k chuồng, có xếp được tất cả các loài sao cho không chuồng nào có hai loài kỵ nhau hay không. App còn có chế độ mở rộng: tìm chromatic number, tức số chuồng ít nhất cần dùng."</a:t>
             </a:r>
             <a:endParaRPr lang="en-US" dirty="0"/>
           </a:p>
@@ -3222,7 +3222,7 @@
             <a:r>
               <a:rPr lang="en-US" dirty="0"/>
               <a:t>Thời lượng: ~32s.
-Lời đọc: "Em mô hình hoá bài toán bằng đồ thị: mỗi loài là một đỉnh, mỗi cặp kỵ nhau là một cạnh, mỗi chuồng là một màu. Cần phân biệt ba khái niệm: tô màu hợp lệ do checker kiểm tra, bài toán k màu — app gọi là k-coloring — và sắc số χ(G), tức chế độ chromatic. Với k từ 3 bài toán thuộc lớp NP-đầy đủ; k bằng 2 giải được trong thời gian đa thức."</a:t>
+Lời đọc: "Em mô hình hoá bài toán bằng đồ thị: mỗi loài là một vertex, mỗi cặp kỵ nhau là một edge, mỗi chuồng là một màu. Cần phân biệt ba khái niệm: tô màu hợp lệ do checker kiểm tra, bài toán k màu — app gọi là k-coloring — và chromatic number χ(G), tức chế độ chromatic. Với k từ 3 bài toán thuộc lớp NP-đầy đủ; k bằng 2 giải được trong thời gian đa thức."</a:t>
             </a:r>
             <a:endParaRPr lang="en-US" dirty="0"/>
           </a:p>
@@ -3310,8 +3310,8 @@
           <a:p>
             <a:r>
               <a:rPr lang="en-US" dirty="0"/>
-              <a:t>Thời lượng: ~22s.
-Lời đọc: "Dữ liệu vào là JSON: danh sách đỉnh, danh sách cạnh, số màu k, và chế độ. Thứ tự đỉnh chính là thứ tự duyệt của greedy, quay lui và vét cạn. Found bằng false từ heuristic chỉ nghĩa là chưa tìm được, không khẳng định vô nghiệm; từ thuật toán chính xác thì khẳng định chắc chắn. App giới hạn 320 đỉnh cho heuristic, 9–10 đỉnh cho quay lui, một ngưỡng an toàn theo kⁿ cho vét cạn."</a:t>
+              <a:t>Thời lượng: ~20s.
+Lời đọc: "Dữ liệu vào là JSON: vertex, edge, số màu k, chế độ. Thứ tự vertex là thứ tự duyệt của greedy, backtracking, exhaustive search. Found=false từ heuristic chỉ nghĩa chưa tìm được, không khẳng định vô nghiệm; từ thuật toán chính xác thì khẳng định chắc chắn. App giới hạn 320 vertex cho heuristic, 9–10 cho backtracking, một ngưỡng an toàn kⁿ cho exhaustive search."</a:t>
             </a:r>
             <a:endParaRPr lang="en-US" dirty="0"/>
           </a:p>
@@ -3400,7 +3400,7 @@
             <a:r>
               <a:rPr lang="en-US" dirty="0"/>
               <a:t>Thời lượng: ~21s.
-Lời đọc: "Một tam giác cần đúng ba màu; với hai màu thì vô nghiệm. Đồ thị vương miện — ví dụ chung của toàn bài — tô được bằng hai màu nhưng tham lam và Welsh–Powell lại thất bại. Dữ liệu sai như số màu bằng không bị app từ chối ngay."</a:t>
+Lời đọc: "Một tam giác cần đúng ba màu; với hai màu thì vô nghiệm. Đồ thị vương miện — ví dụ chung của toàn bài — tô được bằng hai màu nhưng greedy và Welsh–Powell lại thất bại. Dữ liệu sai như số màu bằng không bị app từ chối ngay."</a:t>
             </a:r>
             <a:endParaRPr lang="en-US" dirty="0"/>
           </a:p>
@@ -3489,7 +3489,7 @@
             <a:r>
               <a:rPr lang="en-US" dirty="0"/>
               <a:t>Thời lượng: ~16s.
-Lời đọc: "Danh sách đỉnh có thứ tự quyết định thứ tự duyệt; tập cạnh lưu dạng tập hợp để kiểm tra kề nhau nhanh; độ bão hòa dùng riêng cho DSATUR. Quan trọng nhất là bản ghi trace từng bước — chính là thứ Player dùng để minh họa."</a:t>
+Lời đọc: "Danh sách vertex có thứ tự quyết định thứ tự duyệt; tập edge lưu dạng tập hợp để kiểm tra kề nhau nhanh; độ bão hòa dùng riêng cho DSATUR. Quan trọng nhất là bản ghi trace từng bước — chính là thứ Player dùng để minh họa."</a:t>
             </a:r>
             <a:endParaRPr lang="en-US" dirty="0"/>
           </a:p>
@@ -3577,8 +3577,8 @@
           <a:p>
             <a:r>
               <a:rPr lang="en-US" dirty="0"/>
-              <a:t>Thời lượng: ~24s.
-Lời đọc: "Một clique kích thước ω cần ít nhất ω màu — chặn dưới. Mọi đồ thị tô được bằng Δ cộng 1 màu — chặn trên. Thứ tự duyệt quyết định chất lượng tham lam: trên đồ thị vương miện bên phải, thứ tự xen kẽ A1, B1, A2, B2 buộc tham lam dùng nhiều màu hơn cần. Nên ưu tiên tô đỉnh khó trước, và với thuật toán chính xác, cắt nhánh sớm giúp duyệt ít hơn vét cạn."</a:t>
+              <a:t>Thời lượng: ~32s.
+Lời đọc: "Một clique kích thước ω cần ít nhất ω màu — lower bound. Mọi đồ thị tô được bằng Δ cộng 1 màu — upper bound. Thứ tự duyệt quyết định chất lượng greedy: trên vương miện bên phải, thứ tự xen kẽ A1, B1, A2, B2 khiến greedy bị bế tắc ở k bằng hai, còn ở chromatic mode thì dùng ba màu thay vì hai. Nên ưu tiên vertex khó trước; pruning sớm giúp backtracking duyệt ít hơn exhaustive search."</a:t>
             </a:r>
             <a:endParaRPr lang="en-US" dirty="0"/>
           </a:p>
@@ -4546,7 +4546,7 @@
                 <a:ea typeface="Noto Sans" pitchFamily="34" charset="-122"/>
                 <a:cs typeface="Noto Sans" pitchFamily="34" charset="-120"/>
               </a:rPr>
-              <a:t>Xét đỉnh theo thứ tự cho sẵn; gán màu nhỏ nhất chưa có ở đỉnh kề; không có màu → "chưa tìm được".</a:t>
+              <a:t>Xét vertex theo thứ tự cho sẵn; gán màu nhỏ nhất chưa có ở vertex kề; không có màu → "chưa tìm được".</a:t>
             </a:r>
             <a:endParaRPr lang="en-US" sz="1350" dirty="0"/>
           </a:p>
@@ -4594,7 +4594,7 @@
                 <a:ea typeface="Noto Sans" pitchFamily="34" charset="-122"/>
                 <a:cs typeface="Noto Sans" pitchFamily="34" charset="-120"/>
               </a:rPr>
-              <a:t>order ← đỉnh sắp theo bậc giảm dần, rồi chạy Greedy(order). Trên vương miện mọi đỉnh cùng bậc 2 → thứ tự không đổi → gặp đúng khó khăn của greedy.</a:t>
+              <a:t>order ← vertex sắp theo degree giảm dần, rồi chạy Greedy(order). Trên vương miện mọi vertex cùng degree 2 → thứ tự không đổi → gặp đúng khó khăn của greedy.</a:t>
             </a:r>
             <a:endParaRPr lang="en-US" sz="1350" dirty="0"/>
           </a:p>
@@ -4657,7 +4657,7 @@
         <p:spPr>
           <a:xfrm>
             <a:off x="7132320" y="1417320"/>
-            <a:ext cx="4556455" cy="274320"/>
+            <a:ext cx="4556455" cy="237744"/>
           </a:xfrm>
           <a:prstGeom prst="rect">
             <a:avLst/>
@@ -4673,7 +4673,7 @@
               <a:buNone/>
             </a:pPr>
             <a:r>
-              <a:rPr lang="en-US" sz="1200" b="1" dirty="0">
+              <a:rPr lang="en-US" sz="1100" b="1" dirty="0">
                 <a:solidFill>
                   <a:srgbClr val="52525B"/>
                 </a:solidFill>
@@ -4681,9 +4681,9 @@
                 <a:ea typeface="Noto Sans" pitchFamily="34" charset="-122"/>
                 <a:cs typeface="Noto Sans" pitchFamily="34" charset="-120"/>
               </a:rPr>
-              <a:t>Mã giả (trích mục 4.3 — mã nguyên văn Player hiển thị)</a:t>
-            </a:r>
-            <a:endParaRPr lang="en-US" sz="1200" dirty="0"/>
+              <a:t>Greedy — pseudocode.ts (nguyên văn)</a:t>
+            </a:r>
+            <a:endParaRPr lang="en-US" sz="1100" dirty="0"/>
           </a:p>
         </p:txBody>
       </p:sp>
@@ -4695,12 +4695,12 @@
         </p:nvSpPr>
         <p:spPr>
           <a:xfrm>
-            <a:off x="7132320" y="1783080"/>
-            <a:ext cx="4556455" cy="2322576"/>
+            <a:off x="7132320" y="1691640"/>
+            <a:ext cx="4556455" cy="1810512"/>
           </a:xfrm>
           <a:prstGeom prst="roundRect">
             <a:avLst>
-              <a:gd name="adj" fmla="val 2362"/>
+              <a:gd name="adj" fmla="val 3030"/>
             </a:avLst>
           </a:prstGeom>
           <a:solidFill>
@@ -4722,8 +4722,8 @@
         </p:nvSpPr>
         <p:spPr>
           <a:xfrm>
-            <a:off x="7333488" y="1911096"/>
-            <a:ext cx="4154119" cy="2066544"/>
+            <a:off x="7333488" y="1819656"/>
+            <a:ext cx="4154119" cy="1554480"/>
           </a:xfrm>
           <a:prstGeom prst="rect">
             <a:avLst/>
@@ -4737,12 +4737,12 @@
           <a:p>
             <a:pPr indent="0" marL="0">
               <a:lnSpc>
-                <a:spcPts val="1750"/>
+                <a:spcPts val="1650"/>
               </a:lnSpc>
               <a:buNone/>
             </a:pPr>
             <a:r>
-              <a:rPr lang="en-US" sz="1150" dirty="0">
+              <a:rPr lang="en-US" sz="1050" dirty="0">
                 <a:solidFill>
                   <a:srgbClr val="0A0A0A"/>
                 </a:solidFill>
@@ -4752,37 +4752,17 @@
               </a:rPr>
               <a:t>1. Xét các đỉnh theo thứ tự cho trước</a:t>
             </a:r>
-            <a:endParaRPr lang="en-US" sz="1150" dirty="0"/>
+            <a:endParaRPr lang="en-US" sz="1050" dirty="0"/>
           </a:p>
           <a:p>
             <a:pPr indent="0" marL="0">
               <a:lnSpc>
-                <a:spcPts val="1750"/>
+                <a:spcPts val="1650"/>
               </a:lnSpc>
               <a:buNone/>
             </a:pPr>
             <a:r>
-              <a:rPr lang="en-US" sz="1150" dirty="0">
-                <a:solidFill>
-                  <a:srgbClr val="0A0A0A"/>
-                </a:solidFill>
-                <a:latin typeface="Noto Sans Mono" pitchFamily="34" charset="0"/>
-                <a:ea typeface="Noto Sans Mono" pitchFamily="34" charset="-122"/>
-                <a:cs typeface="Noto Sans Mono" pitchFamily="34" charset="-120"/>
-              </a:rPr>
-              <a:t>   (Welsh–Powell: sắp theo bậc giảm dần)</a:t>
-            </a:r>
-            <a:endParaRPr lang="en-US" sz="1150" dirty="0"/>
-          </a:p>
-          <a:p>
-            <a:pPr indent="0" marL="0">
-              <a:lnSpc>
-                <a:spcPts val="1750"/>
-              </a:lnSpc>
-              <a:buNone/>
-            </a:pPr>
-            <a:r>
-              <a:rPr lang="en-US" sz="1150" dirty="0">
+              <a:rPr lang="en-US" sz="1050" dirty="0">
                 <a:solidFill>
                   <a:srgbClr val="0A0A0A"/>
                 </a:solidFill>
@@ -4792,17 +4772,17 @@
               </a:rPr>
               <a:t>2. Gán màu nhỏ nhất trong k màu chưa</a:t>
             </a:r>
-            <a:endParaRPr lang="en-US" sz="1150" dirty="0"/>
+            <a:endParaRPr lang="en-US" sz="1050" dirty="0"/>
           </a:p>
           <a:p>
             <a:pPr indent="0" marL="0">
               <a:lnSpc>
-                <a:spcPts val="1750"/>
+                <a:spcPts val="1650"/>
               </a:lnSpc>
               <a:buNone/>
             </a:pPr>
             <a:r>
-              <a:rPr lang="en-US" sz="1150" dirty="0">
+              <a:rPr lang="en-US" sz="1050" dirty="0">
                 <a:solidFill>
                   <a:srgbClr val="0A0A0A"/>
                 </a:solidFill>
@@ -4812,17 +4792,17 @@
               </a:rPr>
               <a:t>   dùng ở các đỉnh kề đã tô</a:t>
             </a:r>
-            <a:endParaRPr lang="en-US" sz="1150" dirty="0"/>
+            <a:endParaRPr lang="en-US" sz="1050" dirty="0"/>
           </a:p>
           <a:p>
             <a:pPr indent="0" marL="0">
               <a:lnSpc>
-                <a:spcPts val="1750"/>
+                <a:spcPts val="1650"/>
               </a:lnSpc>
               <a:buNone/>
             </a:pPr>
             <a:r>
-              <a:rPr lang="en-US" sz="1150" dirty="0">
+              <a:rPr lang="en-US" sz="1050" dirty="0">
                 <a:solidFill>
                   <a:srgbClr val="0A0A0A"/>
                 </a:solidFill>
@@ -4830,19 +4810,19 @@
                 <a:ea typeface="Noto Sans Mono" pitchFamily="34" charset="-122"/>
                 <a:cs typeface="Noto Sans Mono" pitchFamily="34" charset="-120"/>
               </a:rPr>
-              <a:t>3. Không còn màu nào khả dụng: dừng —</a:t>
-            </a:r>
-            <a:endParaRPr lang="en-US" sz="1150" dirty="0"/>
+              <a:t>3. Nếu không còn màu nào khả dụng: dừng</a:t>
+            </a:r>
+            <a:endParaRPr lang="en-US" sz="1050" dirty="0"/>
           </a:p>
           <a:p>
             <a:pPr indent="0" marL="0">
               <a:lnSpc>
-                <a:spcPts val="1750"/>
+                <a:spcPts val="1650"/>
               </a:lnSpc>
               <a:buNone/>
             </a:pPr>
             <a:r>
-              <a:rPr lang="en-US" sz="1150" dirty="0">
+              <a:rPr lang="en-US" sz="1050" dirty="0">
                 <a:solidFill>
                   <a:srgbClr val="0A0A0A"/>
                 </a:solidFill>
@@ -4850,19 +4830,19 @@
                 <a:ea typeface="Noto Sans Mono" pitchFamily="34" charset="-122"/>
                 <a:cs typeface="Noto Sans Mono" pitchFamily="34" charset="-120"/>
               </a:rPr>
-              <a:t>   heuristic chưa tìm được, KHÔNG</a:t>
-            </a:r>
-            <a:endParaRPr lang="en-US" sz="1150" dirty="0"/>
+              <a:t>   — heuristic chưa tìm được, không</a:t>
+            </a:r>
+            <a:endParaRPr lang="en-US" sz="1050" dirty="0"/>
           </a:p>
           <a:p>
             <a:pPr indent="0" marL="0">
               <a:lnSpc>
-                <a:spcPts val="1750"/>
+                <a:spcPts val="1650"/>
               </a:lnSpc>
               <a:buNone/>
             </a:pPr>
             <a:r>
-              <a:rPr lang="en-US" sz="1150" dirty="0">
+              <a:rPr lang="en-US" sz="1050" dirty="0">
                 <a:solidFill>
                   <a:srgbClr val="0A0A0A"/>
                 </a:solidFill>
@@ -4872,17 +4852,17 @@
               </a:rPr>
               <a:t>   chứng minh vô nghiệm</a:t>
             </a:r>
-            <a:endParaRPr lang="en-US" sz="1150" dirty="0"/>
+            <a:endParaRPr lang="en-US" sz="1050" dirty="0"/>
           </a:p>
           <a:p>
             <a:pPr indent="0" marL="0">
               <a:lnSpc>
-                <a:spcPts val="1750"/>
+                <a:spcPts val="1650"/>
               </a:lnSpc>
               <a:buNone/>
             </a:pPr>
             <a:r>
-              <a:rPr lang="en-US" sz="1150" dirty="0">
+              <a:rPr lang="en-US" sz="1050" dirty="0">
                 <a:solidFill>
                   <a:srgbClr val="0A0A0A"/>
                 </a:solidFill>
@@ -4890,9 +4870,277 @@
                 <a:ea typeface="Noto Sans Mono" pitchFamily="34" charset="-122"/>
                 <a:cs typeface="Noto Sans Mono" pitchFamily="34" charset="-120"/>
               </a:rPr>
-              <a:t>4. Trả về cách tô nếu tô được hết</a:t>
-            </a:r>
-            <a:endParaRPr lang="en-US" sz="1150" dirty="0"/>
+              <a:t>4. Trả về cách tô nếu tô được hết mọi</a:t>
+            </a:r>
+            <a:endParaRPr lang="en-US" sz="1050" dirty="0"/>
+          </a:p>
+          <a:p>
+            <a:pPr indent="0" marL="0">
+              <a:lnSpc>
+                <a:spcPts val="1650"/>
+              </a:lnSpc>
+              <a:buNone/>
+            </a:pPr>
+            <a:r>
+              <a:rPr lang="en-US" sz="1050" dirty="0">
+                <a:solidFill>
+                  <a:srgbClr val="0A0A0A"/>
+                </a:solidFill>
+                <a:latin typeface="Noto Sans Mono" pitchFamily="34" charset="0"/>
+                <a:ea typeface="Noto Sans Mono" pitchFamily="34" charset="-122"/>
+                <a:cs typeface="Noto Sans Mono" pitchFamily="34" charset="-120"/>
+              </a:rPr>
+              <a:t>   đỉnh</a:t>
+            </a:r>
+            <a:endParaRPr lang="en-US" sz="1050" dirty="0"/>
+          </a:p>
+        </p:txBody>
+      </p:sp>
+      <p:sp>
+        <p:nvSpPr>
+          <p:cNvPr id="11" name="Text 9"/>
+          <p:cNvSpPr/>
+          <p:nvPr/>
+        </p:nvSpPr>
+        <p:spPr>
+          <a:xfrm>
+            <a:off x="7132320" y="3666744"/>
+            <a:ext cx="4556455" cy="237744"/>
+          </a:xfrm>
+          <a:prstGeom prst="rect">
+            <a:avLst/>
+          </a:prstGeom>
+          <a:noFill/>
+          <a:ln/>
+        </p:spPr>
+        <p:txBody>
+          <a:bodyPr wrap="square" rtlCol="0" anchor="ctr"/>
+          <a:lstStyle/>
+          <a:p>
+            <a:pPr indent="0" marL="0">
+              <a:buNone/>
+            </a:pPr>
+            <a:r>
+              <a:rPr lang="en-US" sz="1100" b="1" dirty="0">
+                <a:solidFill>
+                  <a:srgbClr val="52525B"/>
+                </a:solidFill>
+                <a:latin typeface="Noto Sans" pitchFamily="34" charset="0"/>
+                <a:ea typeface="Noto Sans" pitchFamily="34" charset="-122"/>
+                <a:cs typeface="Noto Sans" pitchFamily="34" charset="-120"/>
+              </a:rPr>
+              <a:t>Welsh–Powell — pseudocode.ts (nguyên văn)</a:t>
+            </a:r>
+            <a:endParaRPr lang="en-US" sz="1100" dirty="0"/>
+          </a:p>
+        </p:txBody>
+      </p:sp>
+      <p:sp>
+        <p:nvSpPr>
+          <p:cNvPr id="12" name="Shape 10"/>
+          <p:cNvSpPr/>
+          <p:nvPr/>
+        </p:nvSpPr>
+        <p:spPr>
+          <a:xfrm>
+            <a:off x="7132320" y="3941064"/>
+            <a:ext cx="4556455" cy="1810512"/>
+          </a:xfrm>
+          <a:prstGeom prst="roundRect">
+            <a:avLst>
+              <a:gd name="adj" fmla="val 3030"/>
+            </a:avLst>
+          </a:prstGeom>
+          <a:solidFill>
+            <a:srgbClr val="F4F4F5"/>
+          </a:solidFill>
+          <a:ln w="9525">
+            <a:solidFill>
+              <a:srgbClr val="E4E4E7"/>
+            </a:solidFill>
+            <a:prstDash val="solid"/>
+          </a:ln>
+        </p:spPr>
+      </p:sp>
+      <p:sp>
+        <p:nvSpPr>
+          <p:cNvPr id="13" name="Text 11"/>
+          <p:cNvSpPr/>
+          <p:nvPr/>
+        </p:nvSpPr>
+        <p:spPr>
+          <a:xfrm>
+            <a:off x="7333488" y="4069080"/>
+            <a:ext cx="4154119" cy="1554480"/>
+          </a:xfrm>
+          <a:prstGeom prst="rect">
+            <a:avLst/>
+          </a:prstGeom>
+          <a:noFill/>
+          <a:ln/>
+        </p:spPr>
+        <p:txBody>
+          <a:bodyPr wrap="square" rtlCol="0" anchor="t"/>
+          <a:lstStyle/>
+          <a:p>
+            <a:pPr indent="0" marL="0">
+              <a:lnSpc>
+                <a:spcPts val="1650"/>
+              </a:lnSpc>
+              <a:buNone/>
+            </a:pPr>
+            <a:r>
+              <a:rPr lang="en-US" sz="1050" dirty="0">
+                <a:solidFill>
+                  <a:srgbClr val="0A0A0A"/>
+                </a:solidFill>
+                <a:latin typeface="Noto Sans Mono" pitchFamily="34" charset="0"/>
+                <a:ea typeface="Noto Sans Mono" pitchFamily="34" charset="-122"/>
+                <a:cs typeface="Noto Sans Mono" pitchFamily="34" charset="-120"/>
+              </a:rPr>
+              <a:t>1. Sắp các đỉnh theo bậc giảm dần</a:t>
+            </a:r>
+            <a:endParaRPr lang="en-US" sz="1050" dirty="0"/>
+          </a:p>
+          <a:p>
+            <a:pPr indent="0" marL="0">
+              <a:lnSpc>
+                <a:spcPts val="1650"/>
+              </a:lnSpc>
+              <a:buNone/>
+            </a:pPr>
+            <a:r>
+              <a:rPr lang="en-US" sz="1050" dirty="0">
+                <a:solidFill>
+                  <a:srgbClr val="0A0A0A"/>
+                </a:solidFill>
+                <a:latin typeface="Noto Sans Mono" pitchFamily="34" charset="0"/>
+                <a:ea typeface="Noto Sans Mono" pitchFamily="34" charset="-122"/>
+                <a:cs typeface="Noto Sans Mono" pitchFamily="34" charset="-120"/>
+              </a:rPr>
+              <a:t>2. Gán màu nhỏ nhất trong k màu chưa</a:t>
+            </a:r>
+            <a:endParaRPr lang="en-US" sz="1050" dirty="0"/>
+          </a:p>
+          <a:p>
+            <a:pPr indent="0" marL="0">
+              <a:lnSpc>
+                <a:spcPts val="1650"/>
+              </a:lnSpc>
+              <a:buNone/>
+            </a:pPr>
+            <a:r>
+              <a:rPr lang="en-US" sz="1050" dirty="0">
+                <a:solidFill>
+                  <a:srgbClr val="0A0A0A"/>
+                </a:solidFill>
+                <a:latin typeface="Noto Sans Mono" pitchFamily="34" charset="0"/>
+                <a:ea typeface="Noto Sans Mono" pitchFamily="34" charset="-122"/>
+                <a:cs typeface="Noto Sans Mono" pitchFamily="34" charset="-120"/>
+              </a:rPr>
+              <a:t>   dùng ở các đỉnh kề đã tô</a:t>
+            </a:r>
+            <a:endParaRPr lang="en-US" sz="1050" dirty="0"/>
+          </a:p>
+          <a:p>
+            <a:pPr indent="0" marL="0">
+              <a:lnSpc>
+                <a:spcPts val="1650"/>
+              </a:lnSpc>
+              <a:buNone/>
+            </a:pPr>
+            <a:r>
+              <a:rPr lang="en-US" sz="1050" dirty="0">
+                <a:solidFill>
+                  <a:srgbClr val="0A0A0A"/>
+                </a:solidFill>
+                <a:latin typeface="Noto Sans Mono" pitchFamily="34" charset="0"/>
+                <a:ea typeface="Noto Sans Mono" pitchFamily="34" charset="-122"/>
+                <a:cs typeface="Noto Sans Mono" pitchFamily="34" charset="-120"/>
+              </a:rPr>
+              <a:t>3. Nếu không còn màu nào khả dụng: dừng</a:t>
+            </a:r>
+            <a:endParaRPr lang="en-US" sz="1050" dirty="0"/>
+          </a:p>
+          <a:p>
+            <a:pPr indent="0" marL="0">
+              <a:lnSpc>
+                <a:spcPts val="1650"/>
+              </a:lnSpc>
+              <a:buNone/>
+            </a:pPr>
+            <a:r>
+              <a:rPr lang="en-US" sz="1050" dirty="0">
+                <a:solidFill>
+                  <a:srgbClr val="0A0A0A"/>
+                </a:solidFill>
+                <a:latin typeface="Noto Sans Mono" pitchFamily="34" charset="0"/>
+                <a:ea typeface="Noto Sans Mono" pitchFamily="34" charset="-122"/>
+                <a:cs typeface="Noto Sans Mono" pitchFamily="34" charset="-120"/>
+              </a:rPr>
+              <a:t>   — heuristic chưa tìm được, không</a:t>
+            </a:r>
+            <a:endParaRPr lang="en-US" sz="1050" dirty="0"/>
+          </a:p>
+          <a:p>
+            <a:pPr indent="0" marL="0">
+              <a:lnSpc>
+                <a:spcPts val="1650"/>
+              </a:lnSpc>
+              <a:buNone/>
+            </a:pPr>
+            <a:r>
+              <a:rPr lang="en-US" sz="1050" dirty="0">
+                <a:solidFill>
+                  <a:srgbClr val="0A0A0A"/>
+                </a:solidFill>
+                <a:latin typeface="Noto Sans Mono" pitchFamily="34" charset="0"/>
+                <a:ea typeface="Noto Sans Mono" pitchFamily="34" charset="-122"/>
+                <a:cs typeface="Noto Sans Mono" pitchFamily="34" charset="-120"/>
+              </a:rPr>
+              <a:t>   chứng minh vô nghiệm</a:t>
+            </a:r>
+            <a:endParaRPr lang="en-US" sz="1050" dirty="0"/>
+          </a:p>
+          <a:p>
+            <a:pPr indent="0" marL="0">
+              <a:lnSpc>
+                <a:spcPts val="1650"/>
+              </a:lnSpc>
+              <a:buNone/>
+            </a:pPr>
+            <a:r>
+              <a:rPr lang="en-US" sz="1050" dirty="0">
+                <a:solidFill>
+                  <a:srgbClr val="0A0A0A"/>
+                </a:solidFill>
+                <a:latin typeface="Noto Sans Mono" pitchFamily="34" charset="0"/>
+                <a:ea typeface="Noto Sans Mono" pitchFamily="34" charset="-122"/>
+                <a:cs typeface="Noto Sans Mono" pitchFamily="34" charset="-120"/>
+              </a:rPr>
+              <a:t>4. Trả về cách tô nếu tô được hết mọi</a:t>
+            </a:r>
+            <a:endParaRPr lang="en-US" sz="1050" dirty="0"/>
+          </a:p>
+          <a:p>
+            <a:pPr indent="0" marL="0">
+              <a:lnSpc>
+                <a:spcPts val="1650"/>
+              </a:lnSpc>
+              <a:buNone/>
+            </a:pPr>
+            <a:r>
+              <a:rPr lang="en-US" sz="1050" dirty="0">
+                <a:solidFill>
+                  <a:srgbClr val="0A0A0A"/>
+                </a:solidFill>
+                <a:latin typeface="Noto Sans Mono" pitchFamily="34" charset="0"/>
+                <a:ea typeface="Noto Sans Mono" pitchFamily="34" charset="-122"/>
+                <a:cs typeface="Noto Sans Mono" pitchFamily="34" charset="-120"/>
+              </a:rPr>
+              <a:t>   đỉnh</a:t>
+            </a:r>
+            <a:endParaRPr lang="en-US" sz="1050" dirty="0"/>
           </a:p>
         </p:txBody>
       </p:sp>
@@ -5147,7 +5395,7 @@
                 <a:ea typeface="Noto Sans" pitchFamily="34" charset="-122"/>
                 <a:cs typeface="Noto Sans" pitchFamily="34" charset="-120"/>
               </a:rPr>
-              <a:t>Mở rộng ngoài sách — chọn đỉnh chưa tô có độ bão hòa sat(v) lớn nhất; hòa thì chọn bậc lớn hơn.</a:t>
+              <a:t>Mở rộng ngoài sách — chọn vertex chưa tô có độ bão hòa sat(v) lớn nhất; hòa thì chọn degree lớn hơn.</a:t>
             </a:r>
             <a:endParaRPr lang="en-US" sz="1500" dirty="0"/>
           </a:p>
@@ -5195,7 +5443,7 @@
                 <a:ea typeface="Noto Sans" pitchFamily="34" charset="-122"/>
                 <a:cs typeface="Noto Sans" pitchFamily="34" charset="-120"/>
               </a:rPr>
-              <a:t>Độ phức tạp lý thuyết O(n²+m); trong app O(n³+n·k) vì mỗi vòng tính lại độ bão hòa bằng cách quét mọi cặp đỉnh.</a:t>
+              <a:t>Độ phức tạp lý thuyết O(n²+m); trong app O(n³+n·k) vì mỗi vòng tính lại độ bão hòa bằng cách quét mọi cặp vertex.</a:t>
             </a:r>
             <a:endParaRPr lang="en-US" sz="1500" dirty="0"/>
           </a:p>
@@ -5303,7 +5551,7 @@
                 <a:ea typeface="Noto Sans Mono" pitchFamily="34" charset="-122"/>
                 <a:cs typeface="Noto Sans Mono" pitchFamily="34" charset="-120"/>
               </a:rPr>
-              <a:t>1. sat(v) ← 0 cho mọi đỉnh</a:t>
+              <a:t>1. sat(v) ← 0 cho mọi vertex</a:t>
             </a:r>
             <a:endParaRPr lang="en-US" sz="1200" dirty="0"/>
           </a:p>
@@ -5323,7 +5571,7 @@
                 <a:ea typeface="Noto Sans Mono" pitchFamily="34" charset="-122"/>
                 <a:cs typeface="Noto Sans Mono" pitchFamily="34" charset="-120"/>
               </a:rPr>
-              <a:t>2. Chọn đỉnh chưa tô có sat(v) lớn</a:t>
+              <a:t>2. Chọn vertex chưa tô có sat(v) lớn</a:t>
             </a:r>
             <a:endParaRPr lang="en-US" sz="1200" dirty="0"/>
           </a:p>
@@ -5343,7 +5591,7 @@
                 <a:ea typeface="Noto Sans Mono" pitchFamily="34" charset="-122"/>
                 <a:cs typeface="Noto Sans Mono" pitchFamily="34" charset="-120"/>
               </a:rPr>
-              <a:t>   nhất; hòa → bậc lớn hơn</a:t>
+              <a:t>   nhất; hòa → degree lớn hơn</a:t>
             </a:r>
             <a:endParaRPr lang="en-US" sz="1200" dirty="0"/>
           </a:p>
@@ -5363,7 +5611,7 @@
                 <a:ea typeface="Noto Sans Mono" pitchFamily="34" charset="-122"/>
                 <a:cs typeface="Noto Sans Mono" pitchFamily="34" charset="-120"/>
               </a:rPr>
-              <a:t>3. Gán màu nhỏ nhất chưa có ở đỉnh kề</a:t>
+              <a:t>3. Gán màu nhỏ nhất chưa có ở vertex kề</a:t>
             </a:r>
             <a:endParaRPr lang="en-US" sz="1200" dirty="0"/>
           </a:p>
@@ -5728,7 +5976,7 @@
                 <a:ea typeface="Noto Sans" pitchFamily="34" charset="-122"/>
                 <a:cs typeface="Noto Sans" pitchFamily="34" charset="-120"/>
               </a:rPr>
-              <a:t>Cây tìm kiếm ≤ (n+1)·kⁿ nút. Cận lý thuyết O((n+1)·kⁿ·(Δ+1)); trong app O(n²·kⁿ) vì quét mọi đỉnh mỗi nút.</a:t>
+              <a:t>State-space tree có ≤ (n+1)·kⁿ nút. Cận lý thuyết O((n+1)·kⁿ·(Δ+1)); trong app O(n²·kⁿ) vì quét mọi vertex mỗi nút.</a:t>
             </a:r>
             <a:endParaRPr lang="en-US" sz="1400" dirty="0"/>
           </a:p>
@@ -5752,7 +6000,7 @@
                 <a:ea typeface="Noto Sans" pitchFamily="34" charset="-122"/>
                 <a:cs typeface="Noto Sans" pitchFamily="34" charset="-120"/>
               </a:rPr>
-              <a:t>Chế độ χ(G): chặn dưới = clique tham lam, chặn trên = DSATUR, tăng k dần tới nghiệm đầu tiên.</a:t>
+              <a:t>Chế độ χ(G): lower bound = clique greedy, upper bound = DSATUR, tăng k dần tới nghiệm đầu tiên.</a:t>
             </a:r>
             <a:endParaRPr lang="en-US" sz="1400" dirty="0"/>
           </a:p>
@@ -5940,7 +6188,7 @@
                 <a:ea typeface="Noto Sans Mono" pitchFamily="34" charset="-122"/>
                 <a:cs typeface="Noto Sans Mono" pitchFamily="34" charset="-120"/>
               </a:rPr>
-              <a:t>    if không đỉnh kề nào màu c:</a:t>
+              <a:t>    if không vertex kề nào màu c:</a:t>
             </a:r>
             <a:endParaRPr lang="en-US" sz="1150" dirty="0"/>
           </a:p>
@@ -6000,7 +6248,7 @@
                 <a:ea typeface="Noto Sans Mono" pitchFamily="34" charset="-122"/>
                 <a:cs typeface="Noto Sans Mono" pitchFamily="34" charset="-120"/>
               </a:rPr>
-              <a:t>      color[v] ← chưa tô  // quay lui</a:t>
+              <a:t>      color[v] ← chưa tô  // backtrack</a:t>
             </a:r>
             <a:endParaRPr lang="en-US" sz="1150" dirty="0"/>
           </a:p>
@@ -6301,7 +6549,7 @@
                 <a:ea typeface="Noto Sans" pitchFamily="34" charset="-122"/>
                 <a:cs typeface="Noto Sans" pitchFamily="34" charset="-120"/>
               </a:rPr>
-              <a:t>Cận lý thuyết O(kⁿ·(n+m)); trong app O(kⁿ·n²) vì kiểm tra bằng quét mọi cặp đỉnh.</a:t>
+              <a:t>Cận lý thuyết O(kⁿ·(n+m)); trong app O(kⁿ·n²) vì kiểm tra bằng quét mọi cặp vertex.</a:t>
             </a:r>
             <a:endParaRPr lang="en-US" sz="1500" dirty="0"/>
           </a:p>
@@ -6349,7 +6597,7 @@
                 <a:ea typeface="Noto Sans" pitchFamily="34" charset="-122"/>
                 <a:cs typeface="Noto Sans" pitchFamily="34" charset="-120"/>
               </a:rPr>
-              <a:t>Mốc để so sánh "chi phí cắt nhánh" của quay lui (20 bước so với 69 bước trên ví dụ chung).</a:t>
+              <a:t>Mốc để so sánh "chi phí pruning" của backtracking (20 bước so với 69 bước trên ví dụ chung).</a:t>
             </a:r>
             <a:endParaRPr lang="en-US" sz="1500" dirty="0"/>
           </a:p>
@@ -7860,7 +8108,7 @@
                           <a:ea typeface="Noto Sans" pitchFamily="34" charset="-122"/>
                           <a:cs typeface="Noto Sans" pitchFamily="34" charset="-120"/>
                         </a:rPr>
-                        <a:t>Quay lui</a:t>
+                        <a:t>Backtracking</a:t>
                       </a:r>
                       <a:endParaRPr lang="en-US" sz="1150" dirty="0">
                         <a:latin typeface="Noto Sans" charset="0"/>
@@ -8122,7 +8370,7 @@
                           <a:ea typeface="Noto Sans" pitchFamily="34" charset="-122"/>
                           <a:cs typeface="Noto Sans" pitchFamily="34" charset="-120"/>
                         </a:rPr>
-                        <a:t>Vét cạn</a:t>
+                        <a:t>Exhaustive search</a:t>
                       </a:r>
                       <a:endParaRPr lang="en-US" sz="1150" dirty="0">
                         <a:latin typeface="Noto Sans" charset="0"/>
@@ -8621,7 +8869,7 @@
                 <a:ea typeface="Noto Sans" pitchFamily="34" charset="-122"/>
                 <a:cs typeface="Noto Sans" pitchFamily="34" charset="-120"/>
               </a:rPr>
-              <a:t>Đồ thị vương miện 6 đỉnh: nhóm A = {A1,A2,A3}, nhóm B = {B1,B2,B3}; Ai kỵ mọi Bj trừ Bi → hai phía, χ = 2.</a:t>
+              <a:t>Đồ thị vương miện 6 vertex: nhóm A = {A1,A2,A3}, nhóm B = {B1,B2,B3}; Ai kỵ mọi Bj trừ Bi → hai phía, χ = 2.</a:t>
             </a:r>
             <a:endParaRPr lang="en-US" sz="1500" dirty="0"/>
           </a:p>
@@ -8669,7 +8917,7 @@
                 <a:ea typeface="Noto Sans" pitchFamily="34" charset="-122"/>
                 <a:cs typeface="Noto Sans" pitchFamily="34" charset="-120"/>
               </a:rPr>
-              <a:t>DSATUR tránh được vì luôn ưu tiên đỉnh bị ràng buộc nhiều nhất, không phụ thuộc thứ tự nhập.</a:t>
+              <a:t>DSATUR tránh được vì luôn ưu tiên vertex bị ràng buộc nhiều nhất, không phụ thuộc thứ tự nhập.</a:t>
             </a:r>
             <a:endParaRPr lang="en-US" sz="1500" dirty="0"/>
           </a:p>
@@ -8732,7 +8980,7 @@
                 <a:ea typeface="Noto Sans" pitchFamily="34" charset="-122"/>
                 <a:cs typeface="Noto Sans" pitchFamily="34" charset="-120"/>
               </a:rPr>
-              <a:t>Đồ thị vương miện 6 đỉnh (χ=2)</a:t>
+              <a:t>Đồ thị vương miện 6 vertex (χ=2)</a:t>
             </a:r>
             <a:endParaRPr lang="en-US" sz="1200" dirty="0"/>
           </a:p>
@@ -9076,7 +9324,7 @@
                 <a:ea typeface="Noto Sans" pitchFamily="34" charset="-122"/>
                 <a:cs typeface="Noto Sans" pitchFamily="34" charset="-120"/>
               </a:rPr>
-              <a:t>2</a:t>
+              <a:t>3</a:t>
             </a:r>
             <a:endParaRPr lang="en-US" sz="1100" dirty="0"/>
           </a:p>
@@ -9179,7 +9427,7 @@
                 <a:ea typeface="Noto Sans" pitchFamily="34" charset="-122"/>
                 <a:cs typeface="Noto Sans" pitchFamily="34" charset="-120"/>
               </a:rPr>
-              <a:t>3</a:t>
+              <a:t>5</a:t>
             </a:r>
             <a:endParaRPr lang="en-US" sz="1100" dirty="0"/>
           </a:p>
@@ -9282,7 +9530,7 @@
                 <a:ea typeface="Noto Sans" pitchFamily="34" charset="-122"/>
                 <a:cs typeface="Noto Sans" pitchFamily="34" charset="-120"/>
               </a:rPr>
-              <a:t>4</a:t>
+              <a:t>2</a:t>
             </a:r>
             <a:endParaRPr lang="en-US" sz="1100" dirty="0"/>
           </a:p>
@@ -9385,7 +9633,7 @@
                 <a:ea typeface="Noto Sans" pitchFamily="34" charset="-122"/>
                 <a:cs typeface="Noto Sans" pitchFamily="34" charset="-120"/>
               </a:rPr>
-              <a:t>5</a:t>
+              <a:t>4</a:t>
             </a:r>
             <a:endParaRPr lang="en-US" sz="1100" dirty="0"/>
           </a:p>
@@ -9830,7 +10078,7 @@
                 <a:ea typeface="Noto Sans" pitchFamily="34" charset="-122"/>
                 <a:cs typeface="Noto Sans" pitchFamily="34" charset="-120"/>
               </a:rPr>
-              <a:t>Cạnh: Ai–Bj với i ≠ j (6 cạnh).</a:t>
+              <a:t>Edge: Ai–Bj với i ≠ j (6 edge).</a:t>
             </a:r>
             <a:endParaRPr lang="en-US" sz="1550" dirty="0"/>
           </a:p>
@@ -10598,7 +10846,7 @@
                           <a:ea typeface="Noto Sans" pitchFamily="34" charset="-122"/>
                           <a:cs typeface="Noto Sans" pitchFamily="34" charset="-120"/>
                         </a:rPr>
-                        <a:t>Đỉnh</a:t>
+                        <a:t>Vertex</a:t>
                       </a:r>
                       <a:endParaRPr lang="en-US" sz="1200" dirty="0">
                         <a:latin typeface="Noto Sans" charset="0"/>
@@ -13534,7 +13782,7 @@
                           <a:ea typeface="Noto Sans" pitchFamily="34" charset="-122"/>
                           <a:cs typeface="Noto Sans" pitchFamily="34" charset="-120"/>
                         </a:rPr>
-                        <a:t>Đỉnh</a:t>
+                        <a:t>Vertex</a:t>
                       </a:r>
                       <a:endParaRPr lang="en-US" sz="1150" dirty="0">
                         <a:latin typeface="Noto Sans" charset="0"/>
@@ -13870,7 +14118,7 @@
                           <a:ea typeface="Noto Sans" pitchFamily="34" charset="-122"/>
                           <a:cs typeface="Noto Sans" pitchFamily="34" charset="-120"/>
                         </a:rPr>
-                        <a:t>Quay lui: bỏ B2=1 (hết màu khả thi)</a:t>
+                        <a:t>Backtrack: bỏ B2=1 (hết màu khả thi)</a:t>
                       </a:r>
                       <a:endParaRPr lang="en-US" sz="1150" dirty="0">
                         <a:latin typeface="Noto Sans" charset="0"/>
@@ -14132,7 +14380,7 @@
                           <a:ea typeface="Noto Sans" pitchFamily="34" charset="-122"/>
                           <a:cs typeface="Noto Sans" pitchFamily="34" charset="-120"/>
                         </a:rPr>
-                        <a:t>Quay lui: bỏ A2=1</a:t>
+                        <a:t>Backtrack: bỏ A2=1</a:t>
                       </a:r>
                       <a:endParaRPr lang="en-US" sz="1150" dirty="0">
                         <a:latin typeface="Noto Sans" charset="0"/>
@@ -14394,7 +14642,7 @@
                           <a:ea typeface="Noto Sans" pitchFamily="34" charset="-122"/>
                           <a:cs typeface="Noto Sans" pitchFamily="34" charset="-120"/>
                         </a:rPr>
-                        <a:t>Quay lui: bỏ B1=0 — gốc của bế tắc</a:t>
+                        <a:t>Backtrack: bỏ B1=0 — gốc của bế tắc</a:t>
                       </a:r>
                       <a:endParaRPr lang="en-US" sz="1150" dirty="0">
                         <a:latin typeface="Noto Sans" charset="0"/>
@@ -15180,7 +15428,7 @@
                           <a:ea typeface="Noto Sans" pitchFamily="34" charset="-122"/>
                           <a:cs typeface="Noto Sans" pitchFamily="34" charset="-120"/>
                         </a:rPr>
-                        <a:t>Hoàn tất: tô thành công, 20 bước, 6 lần cắt nhánh</a:t>
+                        <a:t>Hoàn tất: tô thành công, 20 bước, 6 lần pruning</a:t>
                       </a:r>
                       <a:endParaRPr lang="en-US" sz="1150" dirty="0">
                         <a:latin typeface="Noto Sans" charset="0"/>
@@ -15570,6 +15818,76 @@
           </a:p>
         </p:txBody>
       </p:sp>
+      <p:sp>
+        <p:nvSpPr>
+          <p:cNvPr id="9" name="Text 7"/>
+          <p:cNvSpPr/>
+          <p:nvPr/>
+        </p:nvSpPr>
+        <p:spPr>
+          <a:xfrm>
+            <a:off x="502920" y="1417320"/>
+            <a:ext cx="11185855" cy="896112"/>
+          </a:xfrm>
+          <a:prstGeom prst="rect">
+            <a:avLst/>
+          </a:prstGeom>
+          <a:noFill/>
+          <a:ln/>
+        </p:spPr>
+        <p:txBody>
+          <a:bodyPr wrap="square" rtlCol="0" anchor="t"/>
+          <a:lstStyle/>
+          <a:p>
+            <a:pPr marL="228600" indent="-228600">
+              <a:lnSpc>
+                <a:spcPts val="2200"/>
+              </a:lnSpc>
+              <a:spcAft>
+                <a:spcPts val="1000"/>
+              </a:spcAft>
+              <a:buSzPct val="100000"/>
+              <a:buChar char="•"/>
+            </a:pPr>
+            <a:r>
+              <a:rPr lang="en-US" sz="1250" dirty="0">
+                <a:solidFill>
+                  <a:srgbClr val="0A0A0A"/>
+                </a:solidFill>
+                <a:latin typeface="Noto Sans" pitchFamily="34" charset="0"/>
+                <a:ea typeface="Noto Sans" pitchFamily="34" charset="-122"/>
+                <a:cs typeface="Noto Sans" pitchFamily="34" charset="-120"/>
+              </a:rPr>
+              <a:t>Mỗi thuật toán có checkbox riêng để bật/tắt khỏi so sánh; dropdown "Đồng bộ" đồng bộ các lane: Độc lập / % tiến độ / Giai đoạn / Số bước.</a:t>
+            </a:r>
+            <a:endParaRPr lang="en-US" sz="1250" dirty="0"/>
+          </a:p>
+          <a:p>
+            <a:pPr marL="228600" indent="-228600">
+              <a:lnSpc>
+                <a:spcPts val="2200"/>
+              </a:lnSpc>
+              <a:spcAft>
+                <a:spcPts val="1000"/>
+              </a:spcAft>
+              <a:buSzPct val="100000"/>
+              <a:buChar char="•"/>
+            </a:pPr>
+            <a:r>
+              <a:rPr lang="en-US" sz="1250" dirty="0">
+                <a:solidFill>
+                  <a:srgbClr val="0A0A0A"/>
+                </a:solidFill>
+                <a:latin typeface="Noto Sans" pitchFamily="34" charset="0"/>
+                <a:ea typeface="Noto Sans" pitchFamily="34" charset="-122"/>
+                <a:cs typeface="Noto Sans" pitchFamily="34" charset="-120"/>
+              </a:rPr>
+              <a:t>Mỗi lane có thanh trượt "Bước {tên thuật toán}" riêng; bảng kết quả có cột "Trung vị ms", và nút "Đo hiệu năng theo n" mở biểu đồ benchmark.</a:t>
+            </a:r>
+            <a:endParaRPr lang="en-US" sz="1250" dirty="0"/>
+          </a:p>
+        </p:txBody>
+      </p:sp>
       <p:graphicFrame>
         <p:nvGraphicFramePr>
           <p:cNvPr id="20" name="Table 0"/>
@@ -15585,8 +15903,8 @@
           </p:nvPr>
         </p:nvGraphicFramePr>
         <p:xfrm>
-          <a:off x="502920" y="1417320"/>
-          <a:ext cx="11185855" cy="2441448"/>
+          <a:off x="502920" y="2450592"/>
+          <a:ext cx="11185855" cy="2112264"/>
         </p:xfrm>
         <a:graphic>
           <a:graphicData uri="http://schemas.openxmlformats.org/drawingml/2006/table">
@@ -15598,7 +15916,7 @@
                 <a:gridCol w="1188720"/>
                 <a:gridCol w="4389120"/>
               </a:tblGrid>
-              <a:tr h="406908">
+              <a:tr h="352044">
                 <a:tc>
                   <a:txBody>
                     <a:bodyPr/>
@@ -15608,7 +15926,7 @@
                         <a:buNone/>
                       </a:pPr>
                       <a:r>
-                        <a:rPr lang="en-US" sz="1300" b="1" dirty="0">
+                        <a:rPr lang="en-US" sz="1250" b="1" dirty="0">
                           <a:solidFill>
                             <a:srgbClr val="FFFFFF"/>
                           </a:solidFill>
@@ -15618,7 +15936,7 @@
                         </a:rPr>
                         <a:t>Thuật toán</a:t>
                       </a:r>
-                      <a:endParaRPr lang="en-US" sz="1300" dirty="0">
+                      <a:endParaRPr lang="en-US" sz="1250" dirty="0">
                         <a:latin typeface="Noto Sans" charset="0"/>
                         <a:ea typeface="Noto Sans" charset="0"/>
                         <a:cs typeface="Noto Sans" charset="0"/>
@@ -15676,7 +15994,7 @@
                         <a:buNone/>
                       </a:pPr>
                       <a:r>
-                        <a:rPr lang="en-US" sz="1300" b="1" dirty="0">
+                        <a:rPr lang="en-US" sz="1250" b="1" dirty="0">
                           <a:solidFill>
                             <a:srgbClr val="FFFFFF"/>
                           </a:solidFill>
@@ -15686,7 +16004,7 @@
                         </a:rPr>
                         <a:t>Số bước</a:t>
                       </a:r>
-                      <a:endParaRPr lang="en-US" sz="1300" dirty="0">
+                      <a:endParaRPr lang="en-US" sz="1250" dirty="0">
                         <a:latin typeface="Noto Sans" charset="0"/>
                         <a:ea typeface="Noto Sans" charset="0"/>
                         <a:cs typeface="Noto Sans" charset="0"/>
@@ -15744,7 +16062,7 @@
                         <a:buNone/>
                       </a:pPr>
                       <a:r>
-                        <a:rPr lang="en-US" sz="1300" b="1" dirty="0">
+                        <a:rPr lang="en-US" sz="1250" b="1" dirty="0">
                           <a:solidFill>
                             <a:srgbClr val="FFFFFF"/>
                           </a:solidFill>
@@ -15754,7 +16072,7 @@
                         </a:rPr>
                         <a:t>Phép toán</a:t>
                       </a:r>
-                      <a:endParaRPr lang="en-US" sz="1300" dirty="0">
+                      <a:endParaRPr lang="en-US" sz="1250" dirty="0">
                         <a:latin typeface="Noto Sans" charset="0"/>
                         <a:ea typeface="Noto Sans" charset="0"/>
                         <a:cs typeface="Noto Sans" charset="0"/>
@@ -15812,7 +16130,7 @@
                         <a:buNone/>
                       </a:pPr>
                       <a:r>
-                        <a:rPr lang="en-US" sz="1300" b="1" dirty="0">
+                        <a:rPr lang="en-US" sz="1250" b="1" dirty="0">
                           <a:solidFill>
                             <a:srgbClr val="FFFFFF"/>
                           </a:solidFill>
@@ -15822,7 +16140,7 @@
                         </a:rPr>
                         <a:t>Kết quả</a:t>
                       </a:r>
-                      <a:endParaRPr lang="en-US" sz="1300" dirty="0">
+                      <a:endParaRPr lang="en-US" sz="1250" dirty="0">
                         <a:latin typeface="Noto Sans" charset="0"/>
                         <a:ea typeface="Noto Sans" charset="0"/>
                         <a:cs typeface="Noto Sans" charset="0"/>
@@ -15872,7 +16190,7 @@
                   </a:tcPr>
                 </a:tc>
               </a:tr>
-              <a:tr h="406908">
+              <a:tr h="352044">
                 <a:tc>
                   <a:txBody>
                     <a:bodyPr/>
@@ -15882,7 +16200,7 @@
                         <a:buNone/>
                       </a:pPr>
                       <a:r>
-                        <a:rPr lang="en-US" sz="1300" dirty="0">
+                        <a:rPr lang="en-US" sz="1250" dirty="0">
                           <a:solidFill>
                             <a:srgbClr val="0A0A0A"/>
                           </a:solidFill>
@@ -15892,7 +16210,7 @@
                         </a:rPr>
                         <a:t>Greedy</a:t>
                       </a:r>
-                      <a:endParaRPr lang="en-US" sz="1300" dirty="0">
+                      <a:endParaRPr lang="en-US" sz="1250" dirty="0">
                         <a:latin typeface="Noto Sans" charset="0"/>
                         <a:ea typeface="Noto Sans" charset="0"/>
                         <a:cs typeface="Noto Sans" charset="0"/>
@@ -15947,7 +16265,7 @@
                         <a:buNone/>
                       </a:pPr>
                       <a:r>
-                        <a:rPr lang="en-US" sz="1300" dirty="0">
+                        <a:rPr lang="en-US" sz="1250" dirty="0">
                           <a:solidFill>
                             <a:srgbClr val="0A0A0A"/>
                           </a:solidFill>
@@ -15957,7 +16275,7 @@
                         </a:rPr>
                         <a:t>7</a:t>
                       </a:r>
-                      <a:endParaRPr lang="en-US" sz="1300" dirty="0">
+                      <a:endParaRPr lang="en-US" sz="1250" dirty="0">
                         <a:latin typeface="Noto Sans" charset="0"/>
                         <a:ea typeface="Noto Sans" charset="0"/>
                         <a:cs typeface="Noto Sans" charset="0"/>
@@ -16012,7 +16330,7 @@
                         <a:buNone/>
                       </a:pPr>
                       <a:r>
-                        <a:rPr lang="en-US" sz="1300" dirty="0">
+                        <a:rPr lang="en-US" sz="1250" dirty="0">
                           <a:solidFill>
                             <a:srgbClr val="0A0A0A"/>
                           </a:solidFill>
@@ -16022,7 +16340,7 @@
                         </a:rPr>
                         <a:t>5</a:t>
                       </a:r>
-                      <a:endParaRPr lang="en-US" sz="1300" dirty="0">
+                      <a:endParaRPr lang="en-US" sz="1250" dirty="0">
                         <a:latin typeface="Noto Sans" charset="0"/>
                         <a:ea typeface="Noto Sans" charset="0"/>
                         <a:cs typeface="Noto Sans" charset="0"/>
@@ -16077,7 +16395,7 @@
                         <a:buNone/>
                       </a:pPr>
                       <a:r>
-                        <a:rPr lang="en-US" sz="1300" dirty="0">
+                        <a:rPr lang="en-US" sz="1250" dirty="0">
                           <a:solidFill>
                             <a:srgbClr val="0A0A0A"/>
                           </a:solidFill>
@@ -16087,7 +16405,7 @@
                         </a:rPr>
                         <a:t>"Chưa tìm được" — hết màu ở A3</a:t>
                       </a:r>
-                      <a:endParaRPr lang="en-US" sz="1300" dirty="0">
+                      <a:endParaRPr lang="en-US" sz="1250" dirty="0">
                         <a:latin typeface="Noto Sans" charset="0"/>
                         <a:ea typeface="Noto Sans" charset="0"/>
                         <a:cs typeface="Noto Sans" charset="0"/>
@@ -16134,7 +16452,7 @@
                   </a:tcPr>
                 </a:tc>
               </a:tr>
-              <a:tr h="406908">
+              <a:tr h="352044">
                 <a:tc>
                   <a:txBody>
                     <a:bodyPr/>
@@ -16144,7 +16462,7 @@
                         <a:buNone/>
                       </a:pPr>
                       <a:r>
-                        <a:rPr lang="en-US" sz="1300" dirty="0">
+                        <a:rPr lang="en-US" sz="1250" dirty="0">
                           <a:solidFill>
                             <a:srgbClr val="0A0A0A"/>
                           </a:solidFill>
@@ -16154,7 +16472,7 @@
                         </a:rPr>
                         <a:t>Welsh–Powell</a:t>
                       </a:r>
-                      <a:endParaRPr lang="en-US" sz="1300" dirty="0">
+                      <a:endParaRPr lang="en-US" sz="1250" dirty="0">
                         <a:latin typeface="Noto Sans" charset="0"/>
                         <a:ea typeface="Noto Sans" charset="0"/>
                         <a:cs typeface="Noto Sans" charset="0"/>
@@ -16209,7 +16527,7 @@
                         <a:buNone/>
                       </a:pPr>
                       <a:r>
-                        <a:rPr lang="en-US" sz="1300" dirty="0">
+                        <a:rPr lang="en-US" sz="1250" dirty="0">
                           <a:solidFill>
                             <a:srgbClr val="0A0A0A"/>
                           </a:solidFill>
@@ -16219,7 +16537,7 @@
                         </a:rPr>
                         <a:t>7</a:t>
                       </a:r>
-                      <a:endParaRPr lang="en-US" sz="1300" dirty="0">
+                      <a:endParaRPr lang="en-US" sz="1250" dirty="0">
                         <a:latin typeface="Noto Sans" charset="0"/>
                         <a:ea typeface="Noto Sans" charset="0"/>
                         <a:cs typeface="Noto Sans" charset="0"/>
@@ -16274,7 +16592,7 @@
                         <a:buNone/>
                       </a:pPr>
                       <a:r>
-                        <a:rPr lang="en-US" sz="1300" dirty="0">
+                        <a:rPr lang="en-US" sz="1250" dirty="0">
                           <a:solidFill>
                             <a:srgbClr val="0A0A0A"/>
                           </a:solidFill>
@@ -16284,7 +16602,7 @@
                         </a:rPr>
                         <a:t>5</a:t>
                       </a:r>
-                      <a:endParaRPr lang="en-US" sz="1300" dirty="0">
+                      <a:endParaRPr lang="en-US" sz="1250" dirty="0">
                         <a:latin typeface="Noto Sans" charset="0"/>
                         <a:ea typeface="Noto Sans" charset="0"/>
                         <a:cs typeface="Noto Sans" charset="0"/>
@@ -16339,7 +16657,7 @@
                         <a:buNone/>
                       </a:pPr>
                       <a:r>
-                        <a:rPr lang="en-US" sz="1300" dirty="0">
+                        <a:rPr lang="en-US" sz="1250" dirty="0">
                           <a:solidFill>
                             <a:srgbClr val="0A0A0A"/>
                           </a:solidFill>
@@ -16347,9 +16665,9 @@
                           <a:ea typeface="Noto Sans" pitchFamily="34" charset="-122"/>
                           <a:cs typeface="Noto Sans" pitchFamily="34" charset="-120"/>
                         </a:rPr>
-                        <a:t>Giống Greedy — mọi đỉnh cùng bậc 2</a:t>
+                        <a:t>Giống Greedy — mọi vertex cùng degree 2</a:t>
                       </a:r>
-                      <a:endParaRPr lang="en-US" sz="1300" dirty="0">
+                      <a:endParaRPr lang="en-US" sz="1250" dirty="0">
                         <a:latin typeface="Noto Sans" charset="0"/>
                         <a:ea typeface="Noto Sans" charset="0"/>
                         <a:cs typeface="Noto Sans" charset="0"/>
@@ -16396,7 +16714,7 @@
                   </a:tcPr>
                 </a:tc>
               </a:tr>
-              <a:tr h="406908">
+              <a:tr h="352044">
                 <a:tc>
                   <a:txBody>
                     <a:bodyPr/>
@@ -16406,7 +16724,7 @@
                         <a:buNone/>
                       </a:pPr>
                       <a:r>
-                        <a:rPr lang="en-US" sz="1300" dirty="0">
+                        <a:rPr lang="en-US" sz="1250" dirty="0">
                           <a:solidFill>
                             <a:srgbClr val="0A0A0A"/>
                           </a:solidFill>
@@ -16416,7 +16734,7 @@
                         </a:rPr>
                         <a:t>DSATUR</a:t>
                       </a:r>
-                      <a:endParaRPr lang="en-US" sz="1300" dirty="0">
+                      <a:endParaRPr lang="en-US" sz="1250" dirty="0">
                         <a:latin typeface="Noto Sans" charset="0"/>
                         <a:ea typeface="Noto Sans" charset="0"/>
                         <a:cs typeface="Noto Sans" charset="0"/>
@@ -16471,7 +16789,7 @@
                         <a:buNone/>
                       </a:pPr>
                       <a:r>
-                        <a:rPr lang="en-US" sz="1300" dirty="0">
+                        <a:rPr lang="en-US" sz="1250" dirty="0">
                           <a:solidFill>
                             <a:srgbClr val="0A0A0A"/>
                           </a:solidFill>
@@ -16481,7 +16799,7 @@
                         </a:rPr>
                         <a:t>14</a:t>
                       </a:r>
-                      <a:endParaRPr lang="en-US" sz="1300" dirty="0">
+                      <a:endParaRPr lang="en-US" sz="1250" dirty="0">
                         <a:latin typeface="Noto Sans" charset="0"/>
                         <a:ea typeface="Noto Sans" charset="0"/>
                         <a:cs typeface="Noto Sans" charset="0"/>
@@ -16536,7 +16854,7 @@
                         <a:buNone/>
                       </a:pPr>
                       <a:r>
-                        <a:rPr lang="en-US" sz="1300" dirty="0">
+                        <a:rPr lang="en-US" sz="1250" dirty="0">
                           <a:solidFill>
                             <a:srgbClr val="0A0A0A"/>
                           </a:solidFill>
@@ -16546,7 +16864,7 @@
                         </a:rPr>
                         <a:t>6</a:t>
                       </a:r>
-                      <a:endParaRPr lang="en-US" sz="1300" dirty="0">
+                      <a:endParaRPr lang="en-US" sz="1250" dirty="0">
                         <a:latin typeface="Noto Sans" charset="0"/>
                         <a:ea typeface="Noto Sans" charset="0"/>
                         <a:cs typeface="Noto Sans" charset="0"/>
@@ -16601,7 +16919,7 @@
                         <a:buNone/>
                       </a:pPr>
                       <a:r>
-                        <a:rPr lang="en-US" sz="1300" dirty="0">
+                        <a:rPr lang="en-US" sz="1250" dirty="0">
                           <a:solidFill>
                             <a:srgbClr val="0A0A0A"/>
                           </a:solidFill>
@@ -16611,7 +16929,7 @@
                         </a:rPr>
                         <a:t>Tô thành công: [0,1,0,1,0,1]</a:t>
                       </a:r>
-                      <a:endParaRPr lang="en-US" sz="1300" dirty="0">
+                      <a:endParaRPr lang="en-US" sz="1250" dirty="0">
                         <a:latin typeface="Noto Sans" charset="0"/>
                         <a:ea typeface="Noto Sans" charset="0"/>
                         <a:cs typeface="Noto Sans" charset="0"/>
@@ -16658,7 +16976,7 @@
                   </a:tcPr>
                 </a:tc>
               </a:tr>
-              <a:tr h="406908">
+              <a:tr h="352044">
                 <a:tc>
                   <a:txBody>
                     <a:bodyPr/>
@@ -16668,7 +16986,7 @@
                         <a:buNone/>
                       </a:pPr>
                       <a:r>
-                        <a:rPr lang="en-US" sz="1300" dirty="0">
+                        <a:rPr lang="en-US" sz="1250" dirty="0">
                           <a:solidFill>
                             <a:srgbClr val="0A0A0A"/>
                           </a:solidFill>
@@ -16676,9 +16994,9 @@
                           <a:ea typeface="Noto Sans" pitchFamily="34" charset="-122"/>
                           <a:cs typeface="Noto Sans" pitchFamily="34" charset="-120"/>
                         </a:rPr>
-                        <a:t>Quay lui</a:t>
+                        <a:t>Backtracking</a:t>
                       </a:r>
-                      <a:endParaRPr lang="en-US" sz="1300" dirty="0">
+                      <a:endParaRPr lang="en-US" sz="1250" dirty="0">
                         <a:latin typeface="Noto Sans" charset="0"/>
                         <a:ea typeface="Noto Sans" charset="0"/>
                         <a:cs typeface="Noto Sans" charset="0"/>
@@ -16733,7 +17051,7 @@
                         <a:buNone/>
                       </a:pPr>
                       <a:r>
-                        <a:rPr lang="en-US" sz="1300" dirty="0">
+                        <a:rPr lang="en-US" sz="1250" dirty="0">
                           <a:solidFill>
                             <a:srgbClr val="0A0A0A"/>
                           </a:solidFill>
@@ -16743,7 +17061,7 @@
                         </a:rPr>
                         <a:t>20</a:t>
                       </a:r>
-                      <a:endParaRPr lang="en-US" sz="1300" dirty="0">
+                      <a:endParaRPr lang="en-US" sz="1250" dirty="0">
                         <a:latin typeface="Noto Sans" charset="0"/>
                         <a:ea typeface="Noto Sans" charset="0"/>
                         <a:cs typeface="Noto Sans" charset="0"/>
@@ -16798,7 +17116,7 @@
                         <a:buNone/>
                       </a:pPr>
                       <a:r>
-                        <a:rPr lang="en-US" sz="1300" dirty="0">
+                        <a:rPr lang="en-US" sz="1250" dirty="0">
                           <a:solidFill>
                             <a:srgbClr val="0A0A0A"/>
                           </a:solidFill>
@@ -16808,7 +17126,7 @@
                         </a:rPr>
                         <a:t>21</a:t>
                       </a:r>
-                      <a:endParaRPr lang="en-US" sz="1300" dirty="0">
+                      <a:endParaRPr lang="en-US" sz="1250" dirty="0">
                         <a:latin typeface="Noto Sans" charset="0"/>
                         <a:ea typeface="Noto Sans" charset="0"/>
                         <a:cs typeface="Noto Sans" charset="0"/>
@@ -16863,7 +17181,7 @@
                         <a:buNone/>
                       </a:pPr>
                       <a:r>
-                        <a:rPr lang="en-US" sz="1300" dirty="0">
+                        <a:rPr lang="en-US" sz="1250" dirty="0">
                           <a:solidFill>
                             <a:srgbClr val="0A0A0A"/>
                           </a:solidFill>
@@ -16873,7 +17191,7 @@
                         </a:rPr>
                         <a:t>Tô thành công: [0,1,0,1,0,1]</a:t>
                       </a:r>
-                      <a:endParaRPr lang="en-US" sz="1300" dirty="0">
+                      <a:endParaRPr lang="en-US" sz="1250" dirty="0">
                         <a:latin typeface="Noto Sans" charset="0"/>
                         <a:ea typeface="Noto Sans" charset="0"/>
                         <a:cs typeface="Noto Sans" charset="0"/>
@@ -16920,7 +17238,7 @@
                   </a:tcPr>
                 </a:tc>
               </a:tr>
-              <a:tr h="406908">
+              <a:tr h="352044">
                 <a:tc>
                   <a:txBody>
                     <a:bodyPr/>
@@ -16930,7 +17248,7 @@
                         <a:buNone/>
                       </a:pPr>
                       <a:r>
-                        <a:rPr lang="en-US" sz="1300" dirty="0">
+                        <a:rPr lang="en-US" sz="1250" dirty="0">
                           <a:solidFill>
                             <a:srgbClr val="0A0A0A"/>
                           </a:solidFill>
@@ -16938,9 +17256,9 @@
                           <a:ea typeface="Noto Sans" pitchFamily="34" charset="-122"/>
                           <a:cs typeface="Noto Sans" pitchFamily="34" charset="-120"/>
                         </a:rPr>
-                        <a:t>Vét cạn</a:t>
+                        <a:t>Exhaustive search</a:t>
                       </a:r>
-                      <a:endParaRPr lang="en-US" sz="1300" dirty="0">
+                      <a:endParaRPr lang="en-US" sz="1250" dirty="0">
                         <a:latin typeface="Noto Sans" charset="0"/>
                         <a:ea typeface="Noto Sans" charset="0"/>
                         <a:cs typeface="Noto Sans" charset="0"/>
@@ -16995,7 +17313,7 @@
                         <a:buNone/>
                       </a:pPr>
                       <a:r>
-                        <a:rPr lang="en-US" sz="1300" dirty="0">
+                        <a:rPr lang="en-US" sz="1250" dirty="0">
                           <a:solidFill>
                             <a:srgbClr val="0A0A0A"/>
                           </a:solidFill>
@@ -17005,7 +17323,7 @@
                         </a:rPr>
                         <a:t>69</a:t>
                       </a:r>
-                      <a:endParaRPr lang="en-US" sz="1300" dirty="0">
+                      <a:endParaRPr lang="en-US" sz="1250" dirty="0">
                         <a:latin typeface="Noto Sans" charset="0"/>
                         <a:ea typeface="Noto Sans" charset="0"/>
                         <a:cs typeface="Noto Sans" charset="0"/>
@@ -17060,7 +17378,7 @@
                         <a:buNone/>
                       </a:pPr>
                       <a:r>
-                        <a:rPr lang="en-US" sz="1300" dirty="0">
+                        <a:rPr lang="en-US" sz="1250" dirty="0">
                           <a:solidFill>
                             <a:srgbClr val="0A0A0A"/>
                           </a:solidFill>
@@ -17070,7 +17388,7 @@
                         </a:rPr>
                         <a:t>67</a:t>
                       </a:r>
-                      <a:endParaRPr lang="en-US" sz="1300" dirty="0">
+                      <a:endParaRPr lang="en-US" sz="1250" dirty="0">
                         <a:latin typeface="Noto Sans" charset="0"/>
                         <a:ea typeface="Noto Sans" charset="0"/>
                         <a:cs typeface="Noto Sans" charset="0"/>
@@ -17125,7 +17443,7 @@
                         <a:buNone/>
                       </a:pPr>
                       <a:r>
-                        <a:rPr lang="en-US" sz="1300" dirty="0">
+                        <a:rPr lang="en-US" sz="1250" dirty="0">
                           <a:solidFill>
                             <a:srgbClr val="0A0A0A"/>
                           </a:solidFill>
@@ -17135,7 +17453,7 @@
                         </a:rPr>
                         <a:t>Tô thành công: nghiệm đầu tiên ở lá thứ 22</a:t>
                       </a:r>
-                      <a:endParaRPr lang="en-US" sz="1300" dirty="0">
+                      <a:endParaRPr lang="en-US" sz="1250" dirty="0">
                         <a:latin typeface="Noto Sans" charset="0"/>
                         <a:ea typeface="Noto Sans" charset="0"/>
                         <a:cs typeface="Noto Sans" charset="0"/>
@@ -17909,7 +18227,7 @@
                           <a:ea typeface="Noto Sans" pitchFamily="34" charset="-122"/>
                           <a:cs typeface="Noto Sans" pitchFamily="34" charset="-120"/>
                         </a:rPr>
-                        <a:t>Giới thiệu &amp; quay lui m màu</a:t>
+                        <a:t>Giới thiệu &amp; backtracking m màu</a:t>
                       </a:r>
                       <a:endParaRPr lang="en-US" sz="1200" dirty="0">
                         <a:latin typeface="Noto Sans" charset="0"/>
@@ -18173,7 +18491,7 @@
                           <a:ea typeface="Noto Sans" pitchFamily="34" charset="-122"/>
                           <a:cs typeface="Noto Sans" pitchFamily="34" charset="-120"/>
                         </a:rPr>
-                        <a:t>Heuristic theo bậc</a:t>
+                        <a:t>Heuristic theo degree</a:t>
                       </a:r>
                       <a:endParaRPr lang="en-US" sz="1200" dirty="0">
                         <a:latin typeface="Noto Sans" charset="0"/>
@@ -19736,7 +20054,7 @@
                           <a:ea typeface="Noto Sans" pitchFamily="34" charset="-122"/>
                           <a:cs typeface="Noto Sans" pitchFamily="34" charset="-120"/>
                         </a:rPr>
-                        <a:t>Quay lui</a:t>
+                        <a:t>Backtracking</a:t>
                       </a:r>
                       <a:endParaRPr lang="en-US" sz="1300" dirty="0">
                         <a:latin typeface="Noto Sans" charset="0"/>
@@ -19998,7 +20316,7 @@
                           <a:ea typeface="Noto Sans" pitchFamily="34" charset="-122"/>
                           <a:cs typeface="Noto Sans" pitchFamily="34" charset="-120"/>
                         </a:rPr>
-                        <a:t>Vét cạn</a:t>
+                        <a:t>Exhaustive search</a:t>
                       </a:r>
                       <a:endParaRPr lang="en-US" sz="1300" dirty="0">
                         <a:latin typeface="Noto Sans" charset="0"/>
@@ -20582,7 +20900,7 @@
                 <a:ea typeface="Noto Sans" pitchFamily="34" charset="-122"/>
                 <a:cs typeface="Noto Sans" pitchFamily="34" charset="-120"/>
               </a:rPr>
-              <a:t>Nút chuyển nhanh giữa 5 cách giải của cùng bài toán: Greedy, Welsh–Powell, DSATUR, Quay lui, Vét cạn.</a:t>
+              <a:t>Nút chuyển nhanh giữa 5 cách giải của cùng bài toán: Greedy, Welsh–Powell, DSATUR, Backtracking, Exhaustive search.</a:t>
             </a:r>
             <a:endParaRPr lang="en-US" sz="1500" dirty="0"/>
           </a:p>
@@ -20630,7 +20948,7 @@
                 <a:ea typeface="Noto Sans" pitchFamily="34" charset="-122"/>
                 <a:cs typeface="Noto Sans" pitchFamily="34" charset="-120"/>
               </a:rPr>
-              <a:t>Khung đồ thị: màu từng đỉnh ghi bằng số trên nhãn, đỉnh đang xét được làm nổi bật.</a:t>
+              <a:t>Khung đồ thị: màu từng vertex ghi bằng số trên nhãn, vertex đang xét được làm nổi bật.</a:t>
             </a:r>
             <a:endParaRPr lang="en-US" sz="1500" dirty="0"/>
           </a:p>
@@ -20917,7 +21235,7 @@
         <p:spPr>
           <a:xfrm>
             <a:off x="502920" y="1417320"/>
-            <a:ext cx="11185855" cy="2103120"/>
+            <a:ext cx="11185855" cy="2505456"/>
           </a:xfrm>
           <a:prstGeom prst="rect">
             <a:avLst/>
@@ -20940,7 +21258,7 @@
               <a:buChar char="•"/>
             </a:pPr>
             <a:r>
-              <a:rPr lang="en-US" sz="1500" dirty="0">
+              <a:rPr lang="en-US" sz="1300" dirty="0">
                 <a:solidFill>
                   <a:srgbClr val="0A0A0A"/>
                 </a:solidFill>
@@ -20950,7 +21268,7 @@
               </a:rPr>
               <a:t>Khung mã giả: dòng đang chạy được tô đậm.</a:t>
             </a:r>
-            <a:endParaRPr lang="en-US" sz="1500" dirty="0"/>
+            <a:endParaRPr lang="en-US" sz="1300" dirty="0"/>
           </a:p>
           <a:p>
             <a:pPr marL="228600" indent="-228600">
@@ -20964,7 +21282,7 @@
               <a:buChar char="•"/>
             </a:pPr>
             <a:r>
-              <a:rPr lang="en-US" sz="1500" dirty="0">
+              <a:rPr lang="en-US" sz="1300" dirty="0">
                 <a:solidFill>
                   <a:srgbClr val="0A0A0A"/>
                 </a:solidFill>
@@ -20972,9 +21290,9 @@
                 <a:ea typeface="Noto Sans" pitchFamily="34" charset="-122"/>
                 <a:cs typeface="Noto Sans" pitchFamily="34" charset="-120"/>
               </a:rPr>
-              <a:t>Lời giải thích tiếng Việt cho từng bước.</a:t>
-            </a:r>
-            <a:endParaRPr lang="en-US" sz="1500" dirty="0"/>
+              <a:t>Thẻ "Giải thích bước": lời giải thích tiếng Việt cho từng bước.</a:t>
+            </a:r>
+            <a:endParaRPr lang="en-US" sz="1300" dirty="0"/>
           </a:p>
           <a:p>
             <a:pPr marL="228600" indent="-228600">
@@ -20988,7 +21306,7 @@
               <a:buChar char="•"/>
             </a:pPr>
             <a:r>
-              <a:rPr lang="en-US" sz="1500" dirty="0">
+              <a:rPr lang="en-US" sz="1300" dirty="0">
                 <a:solidFill>
                   <a:srgbClr val="0A0A0A"/>
                 </a:solidFill>
@@ -20996,9 +21314,9 @@
                 <a:ea typeface="Noto Sans" pitchFamily="34" charset="-122"/>
                 <a:cs typeface="Noto Sans" pitchFamily="34" charset="-120"/>
               </a:rPr>
-              <a:t>Thanh điều khiển: tiến / lùi / tua / tốc độ, có phím tắt.</a:t>
-            </a:r>
-            <a:endParaRPr lang="en-US" sz="1500" dirty="0"/>
+              <a:t>Thẻ "Trạng thái": hiển thị Giai đoạn hiện tại của thuật toán (place / reject / backtrack / done).</a:t>
+            </a:r>
+            <a:endParaRPr lang="en-US" sz="1300" dirty="0"/>
           </a:p>
           <a:p>
             <a:pPr marL="228600" indent="-228600">
@@ -21012,7 +21330,7 @@
               <a:buChar char="•"/>
             </a:pPr>
             <a:r>
-              <a:rPr lang="en-US" sz="1500" dirty="0">
+              <a:rPr lang="en-US" sz="1300" dirty="0">
                 <a:solidFill>
                   <a:srgbClr val="0A0A0A"/>
                 </a:solidFill>
@@ -21020,9 +21338,9 @@
                 <a:ea typeface="Noto Sans" pitchFamily="34" charset="-122"/>
                 <a:cs typeface="Noto Sans" pitchFamily="34" charset="-120"/>
               </a:rPr>
-              <a:t>Nút chuyển view "Đồ thị" ↔ "Cây trạng thái" — cây đánh dấu riêng các nhánh bị cắt.</a:t>
-            </a:r>
-            <a:endParaRPr lang="en-US" sz="1500" dirty="0"/>
+              <a:t>Thanh điều khiển: tiến / lùi / tua / tốc độ, có phím tắt.</a:t>
+            </a:r>
+            <a:endParaRPr lang="en-US" sz="1300" dirty="0"/>
           </a:p>
           <a:p>
             <a:pPr marL="228600" indent="-228600">
@@ -21036,7 +21354,31 @@
               <a:buChar char="•"/>
             </a:pPr>
             <a:r>
-              <a:rPr lang="en-US" sz="1500" dirty="0">
+              <a:rPr lang="en-US" sz="1300" dirty="0">
+                <a:solidFill>
+                  <a:srgbClr val="0A0A0A"/>
+                </a:solidFill>
+                <a:latin typeface="Noto Sans" pitchFamily="34" charset="0"/>
+                <a:ea typeface="Noto Sans" pitchFamily="34" charset="-122"/>
+                <a:cs typeface="Noto Sans" pitchFamily="34" charset="-120"/>
+              </a:rPr>
+              <a:t>Nút chuyển view giữa "Đồ thị" và "Cây trạng thái" — cây đánh dấu riêng các nhánh bị cắt (pruned).</a:t>
+            </a:r>
+            <a:endParaRPr lang="en-US" sz="1300" dirty="0"/>
+          </a:p>
+          <a:p>
+            <a:pPr marL="228600" indent="-228600">
+              <a:lnSpc>
+                <a:spcPts val="2200"/>
+              </a:lnSpc>
+              <a:spcAft>
+                <a:spcPts val="1000"/>
+              </a:spcAft>
+              <a:buSzPct val="100000"/>
+              <a:buChar char="•"/>
+            </a:pPr>
+            <a:r>
+              <a:rPr lang="en-US" sz="1300" dirty="0">
                 <a:solidFill>
                   <a:srgbClr val="0A0A0A"/>
                 </a:solidFill>
@@ -21046,7 +21388,7 @@
               </a:rPr>
               <a:t>Toàn giao diện chỉ dùng trắng/đen/xám — trạng thái phân biệt bằng độ đậm và viền, không phụ thuộc màu sắc.</a:t>
             </a:r>
-            <a:endParaRPr lang="en-US" sz="1500" dirty="0"/>
+            <a:endParaRPr lang="en-US" sz="1300" dirty="0"/>
           </a:p>
         </p:txBody>
       </p:sp>
@@ -21885,7 +22227,7 @@
         <p:spPr>
           <a:xfrm>
             <a:off x="502920" y="1417320"/>
-            <a:ext cx="11185855" cy="1700784"/>
+            <a:ext cx="11185855" cy="2103120"/>
           </a:xfrm>
           <a:prstGeom prst="rect">
             <a:avLst/>
@@ -21908,7 +22250,7 @@
               <a:buChar char="•"/>
             </a:pPr>
             <a:r>
-              <a:rPr lang="en-US" sz="1500" dirty="0">
+              <a:rPr lang="en-US" sz="1350" dirty="0">
                 <a:solidFill>
                   <a:srgbClr val="0A0A0A"/>
                 </a:solidFill>
@@ -21918,7 +22260,7 @@
               </a:rPr>
               <a:t>22 testcase, chia 6 nhóm: thông thường, biên, nhỏ, lớn, đặc biệt, không hợp lệ.</a:t>
             </a:r>
-            <a:endParaRPr lang="en-US" sz="1500" dirty="0"/>
+            <a:endParaRPr lang="en-US" sz="1350" dirty="0"/>
           </a:p>
           <a:p>
             <a:pPr marL="228600" indent="-228600">
@@ -21932,7 +22274,7 @@
               <a:buChar char="•"/>
             </a:pPr>
             <a:r>
-              <a:rPr lang="en-US" sz="1500" dirty="0">
+              <a:rPr lang="en-US" sz="1350" dirty="0">
                 <a:solidFill>
                   <a:srgbClr val="0A0A0A"/>
                 </a:solidFill>
@@ -21942,7 +22284,7 @@
               </a:rPr>
               <a:t>Chạy toàn bộ bằng một nút, kết quả "Đạt 22/22".</a:t>
             </a:r>
-            <a:endParaRPr lang="en-US" sz="1500" dirty="0"/>
+            <a:endParaRPr lang="en-US" sz="1350" dirty="0"/>
           </a:p>
           <a:p>
             <a:pPr marL="228600" indent="-228600">
@@ -21956,7 +22298,7 @@
               <a:buChar char="•"/>
             </a:pPr>
             <a:r>
-              <a:rPr lang="en-US" sz="1500" dirty="0">
+              <a:rPr lang="en-US" sz="1350" dirty="0">
                 <a:solidFill>
                   <a:srgbClr val="0A0A0A"/>
                 </a:solidFill>
@@ -21964,9 +22306,9 @@
                 <a:ea typeface="Noto Sans" pitchFamily="34" charset="-122"/>
                 <a:cs typeface="Noto Sans" pitchFamily="34" charset="-120"/>
               </a:rPr>
-              <a:t>Mỗi nhánh thuật toán có ít nhất 1 testcase phủ (có nghiệm, vô nghiệm, bế tắc heuristic, χ đã biết, vượt giới hạn…).</a:t>
-            </a:r>
-            <a:endParaRPr lang="en-US" sz="1500" dirty="0"/>
+              <a:t>Hầu hết các nhánh thuật toán được phủ bằng 22 file testcase này (có nghiệm, vô nghiệm, χ đã biết, vượt giới hạn…).</a:t>
+            </a:r>
+            <a:endParaRPr lang="en-US" sz="1350" dirty="0"/>
           </a:p>
           <a:p>
             <a:pPr marL="228600" indent="-228600">
@@ -21980,7 +22322,31 @@
               <a:buChar char="•"/>
             </a:pPr>
             <a:r>
-              <a:rPr lang="en-US" sz="1500" dirty="0">
+              <a:rPr lang="en-US" sz="1350" dirty="0">
+                <a:solidFill>
+                  <a:srgbClr val="0A0A0A"/>
+                </a:solidFill>
+                <a:latin typeface="Noto Sans" pitchFamily="34" charset="0"/>
+                <a:ea typeface="Noto Sans" pitchFamily="34" charset="-122"/>
+                <a:cs typeface="Noto Sans" pitchFamily="34" charset="-120"/>
+              </a:rPr>
+              <a:t>Riêng nhánh "heuristic bế tắc dù đồ thị có nghiệm" được phủ bằng 1 unit test của greedy — chưa có file testcase riêng.</a:t>
+            </a:r>
+            <a:endParaRPr lang="en-US" sz="1350" dirty="0"/>
+          </a:p>
+          <a:p>
+            <a:pPr marL="228600" indent="-228600">
+              <a:lnSpc>
+                <a:spcPts val="2200"/>
+              </a:lnSpc>
+              <a:spcAft>
+                <a:spcPts val="1000"/>
+              </a:spcAft>
+              <a:buSzPct val="100000"/>
+              <a:buChar char="•"/>
+            </a:pPr>
+            <a:r>
+              <a:rPr lang="en-US" sz="1350" dirty="0">
                 <a:solidFill>
                   <a:srgbClr val="0A0A0A"/>
                 </a:solidFill>
@@ -21990,7 +22356,7 @@
               </a:rPr>
               <a:t>Xuất kết quả CSV/JSON để đưa trực tiếp vào report.</a:t>
             </a:r>
-            <a:endParaRPr lang="en-US" sz="1500" dirty="0"/>
+            <a:endParaRPr lang="en-US" sz="1350" dirty="0"/>
           </a:p>
         </p:txBody>
       </p:sp>
@@ -22354,7 +22720,7 @@
                 <a:ea typeface="Noto Sans" pitchFamily="34" charset="-122"/>
                 <a:cs typeface="Noto Sans" pitchFamily="34" charset="-120"/>
               </a:rPr>
-              <a:t>Quay lui/vét cạn báo "Không áp dụng" thay vì treo trình duyệt.</a:t>
+              <a:t>Backtracking/exhaustive search báo "Không áp dụng" thay vì treo trình duyệt.</a:t>
             </a:r>
             <a:endParaRPr lang="en-US" sz="1600" dirty="0"/>
           </a:p>
@@ -27367,7 +27733,7 @@
                           <a:ea typeface="Noto Sans" pitchFamily="34" charset="-122"/>
                           <a:cs typeface="Noto Sans" pitchFamily="34" charset="-120"/>
                         </a:rPr>
-                        <a:t>Môn = đỉnh; hai môn chung sinh viên = cạnh; ca thi = màu</a:t>
+                        <a:t>Môn = vertex; hai môn chung sinh viên = edge; ca thi = màu</a:t>
                       </a:r>
                       <a:endParaRPr lang="en-US" sz="1400" dirty="0">
                         <a:latin typeface="Noto Sans" charset="0"/>
@@ -27895,7 +28261,7 @@
                           <a:ea typeface="Noto Sans" pitchFamily="34" charset="-122"/>
                           <a:cs typeface="Noto Sans" pitchFamily="34" charset="-120"/>
                         </a:rPr>
-                        <a:t>Bài toán tô 9 màu trên đồ thị 81 đỉnh</a:t>
+                        <a:t>Bài toán tô 9 màu trên đồ thị 81 vertex</a:t>
                       </a:r>
                       <a:endParaRPr lang="en-US" sz="1400" dirty="0">
                         <a:latin typeface="Noto Sans" charset="0"/>
@@ -28600,7 +28966,7 @@
                 <a:ea typeface="Noto Sans" pitchFamily="34" charset="-122"/>
                 <a:cs typeface="Noto Sans" pitchFamily="34" charset="-120"/>
               </a:rPr>
-              <a:t>App tự hạ xác suất cạnh p để kỳ vọng số cạnh ≤ 7.200, từ chối nếu số cạnh thực vượt 8.000.</a:t>
+              <a:t>App tự hạ xác suất edge p để kỳ vọng số edge ≤ 7.200, từ chối nếu số edge thực vượt 8.000.</a:t>
             </a:r>
             <a:endParaRPr lang="en-US" sz="1550" dirty="0"/>
           </a:p>
@@ -31873,7 +32239,7 @@
         <p:spPr>
           <a:xfrm>
             <a:off x="502920" y="1417320"/>
-            <a:ext cx="11185855" cy="2505456"/>
+            <a:ext cx="11185855" cy="2907792"/>
           </a:xfrm>
           <a:prstGeom prst="rect">
             <a:avLst/>
@@ -31896,7 +32262,7 @@
               <a:buChar char="•"/>
             </a:pPr>
             <a:r>
-              <a:rPr lang="en-US" sz="1300" b="1" dirty="0">
+              <a:rPr lang="en-US" sz="1200" b="1" dirty="0">
                 <a:solidFill>
                   <a:srgbClr val="0A0A0A"/>
                 </a:solidFill>
@@ -31906,7 +32272,7 @@
               </a:rPr>
               <a:t>Tính đúng:</a:t>
             </a:r>
-            <a:endParaRPr lang="en-US" sz="1300" dirty="0"/>
+            <a:endParaRPr lang="en-US" sz="1200" dirty="0"/>
           </a:p>
           <a:p>
             <a:pPr marL="228600" indent="-228600">
@@ -31920,7 +32286,7 @@
               <a:buChar char="•"/>
             </a:pPr>
             <a:r>
-              <a:rPr lang="en-US" sz="1300" dirty="0">
+              <a:rPr lang="en-US" sz="1200" dirty="0">
                 <a:solidFill>
                   <a:srgbClr val="0A0A0A"/>
                 </a:solidFill>
@@ -31928,9 +32294,9 @@
                 <a:ea typeface="Noto Sans" pitchFamily="34" charset="-122"/>
                 <a:cs typeface="Noto Sans" pitchFamily="34" charset="-120"/>
               </a:rPr>
-              <a:t>"Đạt 22/22"; 314/314 e2e pass trên chính domain https://algorithm-visualizer.hieutk.dev; 825 unit test; quay lui/vét cạn so với oracle độc lập.</a:t>
-            </a:r>
-            <a:endParaRPr lang="en-US" sz="1300" dirty="0"/>
+              <a:t>"Đạt 22/22"; 314/314 e2e pass trên chính domain https://algorithm-visualizer.hieutk.dev; 825 unit test.</a:t>
+            </a:r>
+            <a:endParaRPr lang="en-US" sz="1200" dirty="0"/>
           </a:p>
           <a:p>
             <a:pPr marL="228600" indent="-228600">
@@ -31944,7 +32310,7 @@
               <a:buChar char="•"/>
             </a:pPr>
             <a:r>
-              <a:rPr lang="en-US" sz="1300" b="1" dirty="0">
+              <a:rPr lang="en-US" sz="1200" dirty="0">
                 <a:solidFill>
                   <a:srgbClr val="0A0A0A"/>
                 </a:solidFill>
@@ -31952,9 +32318,9 @@
                 <a:ea typeface="Noto Sans" pitchFamily="34" charset="-122"/>
                 <a:cs typeface="Noto Sans" pitchFamily="34" charset="-120"/>
               </a:rPr>
-              <a:t>Trực quan:</a:t>
-            </a:r>
-            <a:endParaRPr lang="en-US" sz="1300" dirty="0"/>
+              <a:t>Backtracking: so với oracle độc lập existsColoring, trên nhiều seed/kích thước. Exhaustive search: so với backtracking trên nhiều input, cộng kiểm trực tiếp bằng oracle χ(G) trên vài đồ thị nhỏ (vương miện, chu trình).</a:t>
+            </a:r>
+            <a:endParaRPr lang="en-US" sz="1200" dirty="0"/>
           </a:p>
           <a:p>
             <a:pPr marL="228600" indent="-228600">
@@ -31968,7 +32334,7 @@
               <a:buChar char="•"/>
             </a:pPr>
             <a:r>
-              <a:rPr lang="en-US" sz="1300" dirty="0">
+              <a:rPr lang="en-US" sz="1200" b="1" dirty="0">
                 <a:solidFill>
                   <a:srgbClr val="0A0A0A"/>
                 </a:solidFill>
@@ -31976,9 +32342,9 @@
                 <a:ea typeface="Noto Sans" pitchFamily="34" charset="-122"/>
                 <a:cs typeface="Noto Sans" pitchFamily="34" charset="-120"/>
               </a:rPr>
-              <a:t>mỗi bước có mã giả + giải thích + trạng thái đồ thị; lùi được bất kỳ bước; cây trạng thái thấy rõ lúc quay lui.</a:t>
-            </a:r>
-            <a:endParaRPr lang="en-US" sz="1300" dirty="0"/>
+              <a:t>Trực quan:</a:t>
+            </a:r>
+            <a:endParaRPr lang="en-US" sz="1200" dirty="0"/>
           </a:p>
           <a:p>
             <a:pPr marL="228600" indent="-228600">
@@ -31992,7 +32358,7 @@
               <a:buChar char="•"/>
             </a:pPr>
             <a:r>
-              <a:rPr lang="en-US" sz="1300" b="1" dirty="0">
+              <a:rPr lang="en-US" sz="1200" dirty="0">
                 <a:solidFill>
                   <a:srgbClr val="0A0A0A"/>
                 </a:solidFill>
@@ -32000,9 +32366,9 @@
                 <a:ea typeface="Noto Sans" pitchFamily="34" charset="-122"/>
                 <a:cs typeface="Noto Sans" pitchFamily="34" charset="-120"/>
               </a:rPr>
-              <a:t>Hạn chế:</a:t>
-            </a:r>
-            <a:endParaRPr lang="en-US" sz="1300" dirty="0"/>
+              <a:t>mỗi bước có mã giả + giải thích + trạng thái đồ thị; lùi được bất kỳ bước; state-space tree thấy rõ lúc backtrack.</a:t>
+            </a:r>
+            <a:endParaRPr lang="en-US" sz="1200" dirty="0"/>
           </a:p>
           <a:p>
             <a:pPr marL="228600" indent="-228600">
@@ -32016,7 +32382,31 @@
               <a:buChar char="•"/>
             </a:pPr>
             <a:r>
-              <a:rPr lang="en-US" sz="1300" dirty="0">
+              <a:rPr lang="en-US" sz="1200" b="1" dirty="0">
+                <a:solidFill>
+                  <a:srgbClr val="0A0A0A"/>
+                </a:solidFill>
+                <a:latin typeface="Noto Sans" pitchFamily="34" charset="0"/>
+                <a:ea typeface="Noto Sans" pitchFamily="34" charset="-122"/>
+                <a:cs typeface="Noto Sans" pitchFamily="34" charset="-120"/>
+              </a:rPr>
+              <a:t>Hạn chế:</a:t>
+            </a:r>
+            <a:endParaRPr lang="en-US" sz="1200" dirty="0"/>
+          </a:p>
+          <a:p>
+            <a:pPr marL="228600" indent="-228600">
+              <a:lnSpc>
+                <a:spcPts val="2200"/>
+              </a:lnSpc>
+              <a:spcAft>
+                <a:spcPts val="1000"/>
+              </a:spcAft>
+              <a:buSzPct val="100000"/>
+              <a:buChar char="•"/>
+            </a:pPr>
+            <a:r>
+              <a:rPr lang="en-US" sz="1200" dirty="0">
                 <a:solidFill>
                   <a:srgbClr val="0A0A0A"/>
                 </a:solidFill>
@@ -32026,7 +32416,7 @@
               </a:rPr>
               <a:t>thuật toán chính xác chỉ chạy đồ thị nhỏ; với n &gt; 12 không biết χ thật; heuristic không bảo đảm; toàn bộ code do AI sinh, có thể còn lỗi chưa phát hiện.</a:t>
             </a:r>
-            <a:endParaRPr lang="en-US" sz="1300" dirty="0"/>
+            <a:endParaRPr lang="en-US" sz="1200" dirty="0"/>
           </a:p>
         </p:txBody>
       </p:sp>
@@ -32334,7 +32724,7 @@
               <a:buChar char="•"/>
             </a:pPr>
             <a:r>
-              <a:rPr lang="en-US" sz="1500" b="1" dirty="0">
+              <a:rPr lang="en-US" sz="1350" b="1" dirty="0">
                 <a:solidFill>
                   <a:srgbClr val="0A0A0A"/>
                 </a:solidFill>
@@ -32344,7 +32734,7 @@
               </a:rPr>
               <a:t>Hướng phát triển:</a:t>
             </a:r>
-            <a:endParaRPr lang="en-US" sz="1500" dirty="0"/>
+            <a:endParaRPr lang="en-US" sz="1350" dirty="0"/>
           </a:p>
           <a:p>
             <a:pPr marL="228600" indent="-228600">
@@ -32358,7 +32748,7 @@
               <a:buChar char="•"/>
             </a:pPr>
             <a:r>
-              <a:rPr lang="en-US" sz="1500" dirty="0">
+              <a:rPr lang="en-US" sz="1350" dirty="0">
                 <a:solidFill>
                   <a:srgbClr val="0A0A0A"/>
                 </a:solidFill>
@@ -32366,9 +32756,9 @@
                 <a:ea typeface="Noto Sans" pitchFamily="34" charset="-122"/>
                 <a:cs typeface="Noto Sans" pitchFamily="34" charset="-120"/>
               </a:rPr>
-              <a:t>thêm nhánh cận (clique + DSATUR) để tìm χ(G) trên đồ thị lớn hơn; thêm biến thể (tô màu cạnh, list coloring); nhập đồ thị bằng vẽ tay.</a:t>
-            </a:r>
-            <a:endParaRPr lang="en-US" sz="1500" dirty="0"/>
+              <a:t>thêm nhánh cận (clique + DSATUR) để tìm χ(G) trên đồ thị lớn hơn; thêm biến thể (tô màu edge, list coloring); nhập đồ thị bằng vẽ tay.</a:t>
+            </a:r>
+            <a:endParaRPr lang="en-US" sz="1350" dirty="0"/>
           </a:p>
           <a:p>
             <a:pPr marL="228600" indent="-228600">
@@ -32382,7 +32772,7 @@
               <a:buChar char="•"/>
             </a:pPr>
             <a:r>
-              <a:rPr lang="en-US" sz="1500" b="1" dirty="0">
+              <a:rPr lang="en-US" sz="1350" b="1" dirty="0">
                 <a:solidFill>
                   <a:srgbClr val="0A0A0A"/>
                 </a:solidFill>
@@ -32392,7 +32782,7 @@
               </a:rPr>
               <a:t>Mở rộng đã có (≈30s):</a:t>
             </a:r>
-            <a:endParaRPr lang="en-US" sz="1500" dirty="0"/>
+            <a:endParaRPr lang="en-US" sz="1350" dirty="0"/>
           </a:p>
           <a:p>
             <a:pPr marL="228600" indent="-228600">
@@ -32406,7 +32796,7 @@
               <a:buChar char="•"/>
             </a:pPr>
             <a:r>
-              <a:rPr lang="en-US" sz="1500" dirty="0">
+              <a:rPr lang="en-US" sz="1350" dirty="0">
                 <a:solidFill>
                   <a:srgbClr val="0A0A0A"/>
                 </a:solidFill>
@@ -32414,9 +32804,9 @@
                 <a:ea typeface="Noto Sans" pitchFamily="34" charset="-122"/>
                 <a:cs typeface="Noto Sans" pitchFamily="34" charset="-120"/>
               </a:rPr>
-              <a:t>cùng nền tảng Player/So sánh/Testcase phục vụ 47 bài toán, 126 cách giải trong sách Levitin (Dijkstra, LCS, TSP, n-hậu…) — phần chấm điểm chính vẫn là bài Tô màu đồ thị.</a:t>
-            </a:r>
-            <a:endParaRPr lang="en-US" sz="1500" dirty="0"/>
+              <a:t>cùng nền tảng Player/So sánh/Testcase phục vụ 47 bài toán, 126 cách giải — phần lớn theo sách Levitin (Dijkstra, LCS, TSP, n-hậu…), một số ngoại lệ ngoài sách được ghi rõ trong app (DSATUR, Hungarian). Phần chấm điểm chính vẫn là bài Tô màu đồ thị.</a:t>
+            </a:r>
+            <a:endParaRPr lang="en-US" sz="1350" dirty="0"/>
           </a:p>
         </p:txBody>
       </p:sp>
@@ -32923,7 +33313,7 @@
                 <a:ea typeface="Noto Sans" pitchFamily="34" charset="-122"/>
                 <a:cs typeface="Noto Sans" pitchFamily="34" charset="-120"/>
               </a:rPr>
-              <a:t>Mở rộng — tìm sắc số χ(G) (chromatic):</a:t>
+              <a:t>Mở rộng — tìm chromatic number χ(G):</a:t>
             </a:r>
             <a:endParaRPr lang="en-US" sz="1600" dirty="0"/>
           </a:p>
@@ -33204,7 +33594,7 @@
                 <a:ea typeface="Noto Sans" pitchFamily="34" charset="-122"/>
                 <a:cs typeface="Noto Sans" pitchFamily="34" charset="-120"/>
               </a:rPr>
-              <a:t>Đồ thị vô hướng G = (V, E): mỗi loài là một đỉnh; mỗi cặp kỵ nhau là một cạnh; mỗi chuồng là một màu.</a:t>
+              <a:t>Đồ thị vô hướng G = (V, E): mỗi loài là một vertex; mỗi cặp kỵ nhau là một edge; mỗi chuồng là một màu.</a:t>
             </a:r>
             <a:endParaRPr lang="en-US" sz="1600" dirty="0"/>
           </a:p>
@@ -33743,7 +34133,7 @@
                           <a:ea typeface="Noto Sans" pitchFamily="34" charset="-122"/>
                           <a:cs typeface="Noto Sans" pitchFamily="34" charset="-120"/>
                         </a:rPr>
-                        <a:t>Sắc số χ(G)</a:t>
+                        <a:t>Chromatic number χ(G)</a:t>
                       </a:r>
                       <a:endParaRPr lang="en-US" sz="1150" dirty="0">
                         <a:latin typeface="Noto Sans" charset="0"/>
@@ -34136,7 +34526,7 @@
                 <a:ea typeface="Noto Sans" pitchFamily="34" charset="-122"/>
                 <a:cs typeface="Noto Sans" pitchFamily="34" charset="-120"/>
               </a:rPr>
-              <a:t>{ nodes, edges, colors, mode? } — nodes quyết định thứ tự duyệt của greedy/quay lui/vét cạn.</a:t>
+              <a:t>{ nodes, edges, colors, mode? } — nodes quyết định thứ tự duyệt của greedy/backtracking/exhaustive search.</a:t>
             </a:r>
             <a:endParaRPr lang="en-US" sz="1500" dirty="0"/>
           </a:p>
@@ -34411,7 +34801,7 @@
                           <a:ea typeface="Noto Sans" pitchFamily="34" charset="-122"/>
                           <a:cs typeface="Noto Sans" pitchFamily="34" charset="-120"/>
                         </a:rPr>
-                        <a:t>Số đỉnh n</a:t>
+                        <a:t>Số vertex n</a:t>
                       </a:r>
                       <a:endParaRPr lang="en-US" sz="1100" dirty="0">
                         <a:latin typeface="Noto Sans" charset="0"/>
@@ -34543,7 +34933,7 @@
                           <a:ea typeface="Noto Sans" pitchFamily="34" charset="-122"/>
                           <a:cs typeface="Noto Sans" pitchFamily="34" charset="-120"/>
                         </a:rPr>
-                        <a:t>Số cạnh m</a:t>
+                        <a:t>Số edge m</a:t>
                       </a:r>
                       <a:endParaRPr lang="en-US" sz="1100" dirty="0">
                         <a:latin typeface="Noto Sans" charset="0"/>
@@ -34807,7 +35197,7 @@
                           <a:ea typeface="Noto Sans" pitchFamily="34" charset="-122"/>
                           <a:cs typeface="Noto Sans" pitchFamily="34" charset="-120"/>
                         </a:rPr>
-                        <a:t>Quay lui</a:t>
+                        <a:t>Backtracking</a:t>
                       </a:r>
                       <a:endParaRPr lang="en-US" sz="1100" dirty="0">
                         <a:latin typeface="Noto Sans" charset="0"/>
@@ -34939,7 +35329,7 @@
                           <a:ea typeface="Noto Sans" pitchFamily="34" charset="-122"/>
                           <a:cs typeface="Noto Sans" pitchFamily="34" charset="-120"/>
                         </a:rPr>
-                        <a:t>Vét cạn</a:t>
+                        <a:t>Exhaustive search</a:t>
                       </a:r>
                       <a:endParaRPr lang="en-US" sz="1100" dirty="0">
                         <a:latin typeface="Noto Sans" charset="0"/>
@@ -36177,7 +36567,7 @@
                           <a:ea typeface="Noto Sans" pitchFamily="34" charset="-122"/>
                           <a:cs typeface="Noto Sans" pitchFamily="34" charset="-120"/>
                         </a:rPr>
-                        <a:t>Vương miện 6 đỉnh (ví dụ chung)</a:t>
+                        <a:t>Đồ thị vương miện 6 vertex (ví dụ chung)</a:t>
                       </a:r>
                       <a:endParaRPr lang="en-US" sz="1300" dirty="0">
                         <a:latin typeface="Noto Sans" charset="0"/>
@@ -37135,7 +37525,7 @@
                 <a:ea typeface="Noto Sans" pitchFamily="34" charset="-122"/>
                 <a:cs typeface="Noto Sans" pitchFamily="34" charset="-120"/>
               </a:rPr>
-              <a:t>Danh sách đỉnh có thứ tự (nodes) — quyết định thứ tự duyệt.</a:t>
+              <a:t>Danh sách vertex có thứ tự (nodes) — quyết định thứ tự duyệt.</a:t>
             </a:r>
             <a:endParaRPr lang="en-US" sz="1500" dirty="0"/>
           </a:p>
@@ -37159,7 +37549,7 @@
                 <a:ea typeface="Noto Sans" pitchFamily="34" charset="-122"/>
                 <a:cs typeface="Noto Sans" pitchFamily="34" charset="-120"/>
               </a:rPr>
-              <a:t>Tập cạnh dạng Set&lt;string&gt; các cặp đỉnh — kiểm tra kề nhau trong O(1).</a:t>
+              <a:t>Tập edge dạng Set&lt;string&gt; các cặp vertex — kiểm tra kề nhau trong O(1).</a:t>
             </a:r>
             <a:endParaRPr lang="en-US" sz="1500" dirty="0"/>
           </a:p>
@@ -37207,7 +37597,7 @@
                 <a:ea typeface="Noto Sans" pitchFamily="34" charset="-122"/>
                 <a:cs typeface="Noto Sans" pitchFamily="34" charset="-120"/>
               </a:rPr>
-              <a:t>Tập màu bị cấm của đỉnh v: các màu đang có ở đỉnh kề v.</a:t>
+              <a:t>Tập màu bị cấm của vertex v: các màu đang có ở vertex kề v.</a:t>
             </a:r>
             <a:endParaRPr lang="en-US" sz="1500" dirty="0"/>
           </a:p>
@@ -37231,7 +37621,7 @@
                 <a:ea typeface="Noto Sans" pitchFamily="34" charset="-122"/>
                 <a:cs typeface="Noto Sans" pitchFamily="34" charset="-120"/>
               </a:rPr>
-              <a:t>Độ bão hòa sat(v) (chỉ DSATUR): số màu khác nhau ở các đỉnh kề v.</a:t>
+              <a:t>Độ bão hòa sat(v) (chỉ DSATUR): số màu khác nhau ở các vertex kề v.</a:t>
             </a:r>
             <a:endParaRPr lang="en-US" sz="1500" dirty="0"/>
           </a:p>
@@ -37255,7 +37645,7 @@
                 <a:ea typeface="Noto Sans" pitchFamily="34" charset="-122"/>
                 <a:cs typeface="Noto Sans" pitchFamily="34" charset="-120"/>
               </a:rPr>
-              <a:t>Trace từng bước: lineId mã giả, trạng thái đồ thị, cây trạng thái (treeNodes), lời giải thích.</a:t>
+              <a:t>Trace từng bước: lineId mã giả, trạng thái đồ thị, state-space tree (treeNodes), lời giải thích.</a:t>
             </a:r>
             <a:endParaRPr lang="en-US" sz="1500" dirty="0"/>
           </a:p>
@@ -37512,7 +37902,7 @@
                 <a:ea typeface="Noto Sans" pitchFamily="34" charset="-122"/>
                 <a:cs typeface="Noto Sans" pitchFamily="34" charset="-120"/>
               </a:rPr>
-              <a:t>Chặn dưới: một clique kích thước ω cần ít nhất ω màu (tam giác cần 3 màu).</a:t>
+              <a:t>Lower bound: một clique kích thước ω cần ít nhất ω màu (tam giác cần 3 màu).</a:t>
             </a:r>
             <a:endParaRPr lang="en-US" sz="1450" dirty="0"/>
           </a:p>
@@ -37536,7 +37926,7 @@
                 <a:ea typeface="Noto Sans" pitchFamily="34" charset="-122"/>
                 <a:cs typeface="Noto Sans" pitchFamily="34" charset="-120"/>
               </a:rPr>
-              <a:t>Chặn trên: mọi đồ thị tô được bằng Δ+1 màu (Δ = bậc lớn nhất).</a:t>
+              <a:t>Upper bound: mọi đồ thị tô được bằng Δ+1 màu (Δ = degree lớn nhất).</a:t>
             </a:r>
             <a:endParaRPr lang="en-US" sz="1450" dirty="0"/>
           </a:p>
@@ -37560,7 +37950,7 @@
                 <a:ea typeface="Noto Sans" pitchFamily="34" charset="-122"/>
                 <a:cs typeface="Noto Sans" pitchFamily="34" charset="-120"/>
               </a:rPr>
-              <a:t>Thứ tự duyệt quyết định chất lượng tham lam — luôn có thứ tự cho đúng χ(G), nhưng cũng có thứ tự xấu.</a:t>
+              <a:t>Thứ tự duyệt quyết định chất lượng greedy — luôn có thứ tự cho đúng χ(G), nhưng cũng có thứ tự xấu.</a:t>
             </a:r>
             <a:endParaRPr lang="en-US" sz="1450" dirty="0"/>
           </a:p>
@@ -37584,7 +37974,7 @@
                 <a:ea typeface="Noto Sans" pitchFamily="34" charset="-122"/>
                 <a:cs typeface="Noto Sans" pitchFamily="34" charset="-120"/>
               </a:rPr>
-              <a:t>Ưu tiên đỉnh "khó" trước (bậc cao / bị ràng buộc nhiều) để tránh hết màu.</a:t>
+              <a:t>Ưu tiên vertex "khó" trước (degree cao / bị ràng buộc nhiều) để tránh hết màu.</a:t>
             </a:r>
             <a:endParaRPr lang="en-US" sz="1450" dirty="0"/>
           </a:p>
@@ -37608,7 +37998,7 @@
                 <a:ea typeface="Noto Sans" pitchFamily="34" charset="-122"/>
                 <a:cs typeface="Noto Sans" pitchFamily="34" charset="-120"/>
               </a:rPr>
-              <a:t>Không gian tìm kiếm có kⁿ cách gán; quay lui cắt nhánh sớm để duyệt ít hơn vét cạn.</a:t>
+              <a:t>Không gian tìm kiếm có kⁿ cách gán; backtracking pruning sớm để duyệt ít hơn exhaustive search.</a:t>
             </a:r>
             <a:endParaRPr lang="en-US" sz="1450" dirty="0"/>
           </a:p>
@@ -37991,7 +38381,7 @@
                 <a:ea typeface="Noto Sans" pitchFamily="34" charset="-122"/>
                 <a:cs typeface="Noto Sans" pitchFamily="34" charset="-120"/>
               </a:rPr>
-              <a:t>2</a:t>
+              <a:t>3</a:t>
             </a:r>
             <a:endParaRPr lang="en-US" sz="1100" dirty="0"/>
           </a:p>
@@ -38094,7 +38484,7 @@
                 <a:ea typeface="Noto Sans" pitchFamily="34" charset="-122"/>
                 <a:cs typeface="Noto Sans" pitchFamily="34" charset="-120"/>
               </a:rPr>
-              <a:t>3</a:t>
+              <a:t>5</a:t>
             </a:r>
             <a:endParaRPr lang="en-US" sz="1100" dirty="0"/>
           </a:p>
@@ -38197,7 +38587,7 @@
                 <a:ea typeface="Noto Sans" pitchFamily="34" charset="-122"/>
                 <a:cs typeface="Noto Sans" pitchFamily="34" charset="-120"/>
               </a:rPr>
-              <a:t>4</a:t>
+              <a:t>2</a:t>
             </a:r>
             <a:endParaRPr lang="en-US" sz="1100" dirty="0"/>
           </a:p>
@@ -38300,7 +38690,7 @@
                 <a:ea typeface="Noto Sans" pitchFamily="34" charset="-122"/>
                 <a:cs typeface="Noto Sans" pitchFamily="34" charset="-120"/>
               </a:rPr>
-              <a:t>5</a:t>
+              <a:t>4</a:t>
             </a:r>
             <a:endParaRPr lang="en-US" sz="1100" dirty="0"/>
           </a:p>
@@ -38445,7 +38835,7 @@
                 <a:ea typeface="Noto Sans" pitchFamily="34" charset="-122"/>
                 <a:cs typeface="Noto Sans" pitchFamily="34" charset="-120"/>
               </a:rPr>
-              <a:t>Vương miện 6 đỉnh, χ=2 — nhưng thứ tự xen kẽ A1,B1,A2,B2,A3,B3 buộc greedy dùng tới n màu.</a:t>
+              <a:t>Đồ thị vương miện 6 vertex, χ=2 — thứ tự xen kẽ A1,B1,A2,B2,A3,B3: ở k-coloring (k=2) greedy bị bế tắc; ở chromatic mode greedy dùng 3 màu thay vì 2.</a:t>
             </a:r>
             <a:endParaRPr lang="en-US" sz="1100" dirty="0"/>
           </a:p>

--- a/presentation/algorithm-visualizer-video.pptx
+++ b/presentation/algorithm-visualizer-video.pptx
@@ -1431,9 +1431,9 @@
           <a:p>
             <a:r>
               <a:rPr lang="en-US" dirty="0"/>
-              <a:t>Thời lượng slide: ~20s + demo ~18s (tổng ~38s).
+              <a:t>Thời lượng slide: ~20s + demo ~24s (tổng ~44s).
 Lời đọc: "Trên trang So sánh, năm thuật toán chạy cùng lúc — mỗi thuật toán có checkbox riêng, và dropdown Đồng bộ đồng bộ các lane theo phần trăm tiến độ, giai đoạn hoặc số bước. Greedy và Welsh–Powell báo chưa tìm được. DSATUR thành công trong mười bốn bước. Backtracking chỉ cần hai mươi bước so với sáu mươi chín của exhaustive search."
-[CHUYỂN SANG DEMO: https://algorithm-visualizer.hieutk.dev/compare/graph-coloring → dán lại JSON ví dụ chung vào trình nhập → bấm "Chạy tất cả" → tắt/bật thử 1 checkbox thuật toán → mở dropdown "Đồng bộ" và chọn "% tiến độ" → kéo thử thanh trượt "Bước" của một lane → zoom vào cột số bước/phép toán và cột "Trung vị ms"]</a:t>
+[CHUYỂN SANG DEMO: https://algorithm-visualizer.hieutk.dev/compare/graph-coloring → dán lại JSON ví dụ chung vào trình nhập → TRƯỚC KHI chạy: tắt/bật thử 1 checkbox thuật toán để minh họa, rồi đảm bảo lại đủ 5 checkbox được chọn → mở dropdown "Đồng bộ" và chọn "% tiến độ" → bấm "Chạy tất cả" (cả 5 kết quả cùng xuất hiện vì không còn checkbox nào bị tắt) → kéo thử thanh trượt "Bước" của một lane → zoom vào cột số bước/phép toán và cột "Trung vị ms" → bấm nút "Đo hiệu năng theo n" → zoom vào biểu đồ benchmark hiện ra]</a:t>
             </a:r>
             <a:endParaRPr lang="en-US" dirty="0"/>
           </a:p>
@@ -1971,9 +1971,9 @@
           <a:p>
             <a:r>
               <a:rPr lang="en-US" dirty="0"/>
-              <a:t>Thời lượng slide: ~17s + demo ~16s (tổng ~33s).
-Lời đọc: "Trang Testcase chạy toàn bộ dữ liệu, chia sáu nhóm, đạt 22 trên 22 ca. Phần lớn nhánh thuật toán được phủ ngay trong 22 file này; riêng heuristic bế tắc dù đồ thị có nghiệm thì được phủ bằng một unit test của greedy, chưa có file riêng. Kết quả xuất CSV hoặc JSON để đưa vào report."
-[CHUYỂN SANG DEMO: /testcases/graph-coloring → bấm chạy toàn bộ → dừng ở dòng "Đạt 22/22" → cuộn qua các nhóm → bấm xuất CSV/JSON]</a:t>
+              <a:t>Thời lượng slide: ~20s + demo ~18s (tổng ~38s).
+Lời đọc: "Trang Testcase chạy toàn bộ dữ liệu, chia sáu nhóm, đạt 22 trên 22 ca. Phần lớn nhánh thuật toán được phủ ngay trong 22 file này; riêng heuristic bế tắc dù đồ thị có nghiệm thì được phủ bằng một unit test của greedy, chưa có file riêng. Thẻ Hiệu năng theo n còn cho đo thời gian chạy theo kích thước n. Kết quả xuất CSV hoặc JSON để đưa vào report."
+[CHUYỂN SANG DEMO: /testcases/graph-coloring → bấm chạy toàn bộ → dừng ở dòng "Đạt 22/22" → cuộn qua các nhóm → cuộn tới thẻ "Hiệu năng theo n", bấm nút "Đo thời gian" → zoom vào biểu đồ hiện ra → bấm xuất CSV/JSON]</a:t>
             </a:r>
             <a:endParaRPr lang="en-US" dirty="0"/>
           </a:p>
@@ -2953,7 +2953,7 @@
             <a:r>
               <a:rPr lang="en-US" dirty="0"/>
               <a:t>Thời lượng slide: ~18s + demo ~10s (tổng ~28s).
-Lời đọc: "Hướng tới: thêm nhánh cận để tìm χ(G) trên đồ thị lớn hơn, thêm biến thể như tô màu edge. Nền tảng này còn dùng cho 47 bài toán, 126 cách giải — phần lớn theo Levitin, trừ vài ngoại lệ app ghi rõ như DSATUR, Hungarian. Phần nộp chấm chính vẫn là bài tô màu đồ thị."
+Lời đọc: "Hướng tới: thêm nhánh cận để tìm χ(G) trên đồ thị lớn hơn, thêm biến thể như edge coloring. Nền tảng này còn dùng cho 47 bài toán, 126 cách giải — phần lớn theo Levitin, trừ vài ngoại lệ app ghi rõ như DSATUR, Hungarian. Phần nộp chấm chính vẫn là bài tô màu đồ thị."
 [CHUYỂN SANG DEMO: /algorithms → Ctrl+K gõ "Dijkstra" → mở Player Dijkstra (hoặc LCS) → cho chạy 3–4 bước]</a:t>
             </a:r>
             <a:endParaRPr lang="en-US" dirty="0"/>
@@ -10078,7 +10078,7 @@
                 <a:ea typeface="Noto Sans" pitchFamily="34" charset="-122"/>
                 <a:cs typeface="Noto Sans" pitchFamily="34" charset="-120"/>
               </a:rPr>
-              <a:t>Edge: Ai–Bj với i ≠ j (6 edge).</a:t>
+              <a:t>Edges: Ai–Bj với i ≠ j (6 edges).</a:t>
             </a:r>
             <a:endParaRPr lang="en-US" sz="1550" dirty="0"/>
           </a:p>
@@ -22227,7 +22227,7 @@
         <p:spPr>
           <a:xfrm>
             <a:off x="502920" y="1417320"/>
-            <a:ext cx="11185855" cy="2103120"/>
+            <a:ext cx="11185855" cy="2505456"/>
           </a:xfrm>
           <a:prstGeom prst="rect">
             <a:avLst/>
@@ -22250,7 +22250,7 @@
               <a:buChar char="•"/>
             </a:pPr>
             <a:r>
-              <a:rPr lang="en-US" sz="1350" dirty="0">
+              <a:rPr lang="en-US" sz="1250" dirty="0">
                 <a:solidFill>
                   <a:srgbClr val="0A0A0A"/>
                 </a:solidFill>
@@ -22260,7 +22260,7 @@
               </a:rPr>
               <a:t>22 testcase, chia 6 nhóm: thông thường, biên, nhỏ, lớn, đặc biệt, không hợp lệ.</a:t>
             </a:r>
-            <a:endParaRPr lang="en-US" sz="1350" dirty="0"/>
+            <a:endParaRPr lang="en-US" sz="1250" dirty="0"/>
           </a:p>
           <a:p>
             <a:pPr marL="228600" indent="-228600">
@@ -22274,7 +22274,7 @@
               <a:buChar char="•"/>
             </a:pPr>
             <a:r>
-              <a:rPr lang="en-US" sz="1350" dirty="0">
+              <a:rPr lang="en-US" sz="1250" dirty="0">
                 <a:solidFill>
                   <a:srgbClr val="0A0A0A"/>
                 </a:solidFill>
@@ -22284,7 +22284,7 @@
               </a:rPr>
               <a:t>Chạy toàn bộ bằng một nút, kết quả "Đạt 22/22".</a:t>
             </a:r>
-            <a:endParaRPr lang="en-US" sz="1350" dirty="0"/>
+            <a:endParaRPr lang="en-US" sz="1250" dirty="0"/>
           </a:p>
           <a:p>
             <a:pPr marL="228600" indent="-228600">
@@ -22298,7 +22298,7 @@
               <a:buChar char="•"/>
             </a:pPr>
             <a:r>
-              <a:rPr lang="en-US" sz="1350" dirty="0">
+              <a:rPr lang="en-US" sz="1250" dirty="0">
                 <a:solidFill>
                   <a:srgbClr val="0A0A0A"/>
                 </a:solidFill>
@@ -22308,7 +22308,7 @@
               </a:rPr>
               <a:t>Hầu hết các nhánh thuật toán được phủ bằng 22 file testcase này (có nghiệm, vô nghiệm, χ đã biết, vượt giới hạn…).</a:t>
             </a:r>
-            <a:endParaRPr lang="en-US" sz="1350" dirty="0"/>
+            <a:endParaRPr lang="en-US" sz="1250" dirty="0"/>
           </a:p>
           <a:p>
             <a:pPr marL="228600" indent="-228600">
@@ -22322,7 +22322,7 @@
               <a:buChar char="•"/>
             </a:pPr>
             <a:r>
-              <a:rPr lang="en-US" sz="1350" dirty="0">
+              <a:rPr lang="en-US" sz="1250" dirty="0">
                 <a:solidFill>
                   <a:srgbClr val="0A0A0A"/>
                 </a:solidFill>
@@ -22332,7 +22332,7 @@
               </a:rPr>
               <a:t>Riêng nhánh "heuristic bế tắc dù đồ thị có nghiệm" được phủ bằng 1 unit test của greedy — chưa có file testcase riêng.</a:t>
             </a:r>
-            <a:endParaRPr lang="en-US" sz="1350" dirty="0"/>
+            <a:endParaRPr lang="en-US" sz="1250" dirty="0"/>
           </a:p>
           <a:p>
             <a:pPr marL="228600" indent="-228600">
@@ -22346,7 +22346,31 @@
               <a:buChar char="•"/>
             </a:pPr>
             <a:r>
-              <a:rPr lang="en-US" sz="1350" dirty="0">
+              <a:rPr lang="en-US" sz="1250" dirty="0">
+                <a:solidFill>
+                  <a:srgbClr val="0A0A0A"/>
+                </a:solidFill>
+                <a:latin typeface="Noto Sans" pitchFamily="34" charset="0"/>
+                <a:ea typeface="Noto Sans" pitchFamily="34" charset="-122"/>
+                <a:cs typeface="Noto Sans" pitchFamily="34" charset="-120"/>
+              </a:rPr>
+              <a:t>Thẻ "Hiệu năng theo n": nút "Đo thời gian" mở biểu đồ thời gian chạy theo n.</a:t>
+            </a:r>
+            <a:endParaRPr lang="en-US" sz="1250" dirty="0"/>
+          </a:p>
+          <a:p>
+            <a:pPr marL="228600" indent="-228600">
+              <a:lnSpc>
+                <a:spcPts val="2200"/>
+              </a:lnSpc>
+              <a:spcAft>
+                <a:spcPts val="1000"/>
+              </a:spcAft>
+              <a:buSzPct val="100000"/>
+              <a:buChar char="•"/>
+            </a:pPr>
+            <a:r>
+              <a:rPr lang="en-US" sz="1250" dirty="0">
                 <a:solidFill>
                   <a:srgbClr val="0A0A0A"/>
                 </a:solidFill>
@@ -22356,7 +22380,7 @@
               </a:rPr>
               <a:t>Xuất kết quả CSV/JSON để đưa trực tiếp vào report.</a:t>
             </a:r>
-            <a:endParaRPr lang="en-US" sz="1350" dirty="0"/>
+            <a:endParaRPr lang="en-US" sz="1250" dirty="0"/>
           </a:p>
         </p:txBody>
       </p:sp>
@@ -28966,7 +28990,7 @@
                 <a:ea typeface="Noto Sans" pitchFamily="34" charset="-122"/>
                 <a:cs typeface="Noto Sans" pitchFamily="34" charset="-120"/>
               </a:rPr>
-              <a:t>App tự hạ xác suất edge p để kỳ vọng số edge ≤ 7.200, từ chối nếu số edge thực vượt 8.000.</a:t>
+              <a:t>App tự hạ xác suất edge p để kỳ vọng số edges ≤ 7.200, từ chối nếu số edges thực vượt 8.000.</a:t>
             </a:r>
             <a:endParaRPr lang="en-US" sz="1550" dirty="0"/>
           </a:p>
@@ -32756,7 +32780,7 @@
                 <a:ea typeface="Noto Sans" pitchFamily="34" charset="-122"/>
                 <a:cs typeface="Noto Sans" pitchFamily="34" charset="-120"/>
               </a:rPr>
-              <a:t>thêm nhánh cận (clique + DSATUR) để tìm χ(G) trên đồ thị lớn hơn; thêm biến thể (tô màu edge, list coloring); nhập đồ thị bằng vẽ tay.</a:t>
+              <a:t>thêm nhánh cận (clique + DSATUR) để tìm χ(G) trên đồ thị lớn hơn; thêm biến thể (edge coloring, list coloring); nhập đồ thị bằng vẽ tay.</a:t>
             </a:r>
             <a:endParaRPr lang="en-US" sz="1350" dirty="0"/>
           </a:p>
@@ -37573,7 +37597,7 @@
                 <a:ea typeface="Noto Sans" pitchFamily="34" charset="-122"/>
                 <a:cs typeface="Noto Sans" pitchFamily="34" charset="-120"/>
               </a:rPr>
-              <a:t>Mảng màu color[v], với −1 là chưa tô.</a:t>
+              <a:t>Mảng màu color[v], với null là chưa tô.</a:t>
             </a:r>
             <a:endParaRPr lang="en-US" sz="1500" dirty="0"/>
           </a:p>
